--- a/presentations/github-copilot-data-scientists-desjardins.pptx
+++ b/presentations/github-copilot-data-scientists-desjardins.pptx
@@ -3956,8 +3956,14 @@
           <a:lstStyle/>
           <a:p>
             <a:pPr>
-              <a:spcAft>
-                <a:spcPts val="600"/>
+              <a:lnSpc>
+                <a:spcPct val="104000"/>
+              </a:lnSpc>
+              <a:spcBef>
+                <a:spcPts val="0"/>
+              </a:spcBef>
+              <a:spcAft>
+                <a:spcPts val="0"/>
               </a:spcAft>
               <a:defRPr sz="1100" b="1">
                 <a:solidFill>
@@ -3967,6 +3973,7 @@
               </a:defRPr>
             </a:pPr>
             <a:r>
+              <a:rPr lang="en-CA"/>
               <a:t>DATA SCIENCE  /  VS CODE</a:t>
             </a:r>
           </a:p>
@@ -3981,7 +3988,7 @@
         <p:spPr>
           <a:xfrm>
             <a:off x="612648" y="1133856"/>
-            <a:ext cx="6720840" cy="1508760"/>
+            <a:ext cx="6720840" cy="1847088"/>
           </a:xfrm>
           <a:prstGeom prst="rect">
             <a:avLst/>
@@ -3995,8 +4002,14 @@
           <a:lstStyle/>
           <a:p>
             <a:pPr>
-              <a:spcAft>
-                <a:spcPts val="600"/>
+              <a:lnSpc>
+                <a:spcPct val="104000"/>
+              </a:lnSpc>
+              <a:spcBef>
+                <a:spcPts val="0"/>
+              </a:spcBef>
+              <a:spcAft>
+                <a:spcPts val="0"/>
               </a:spcAft>
               <a:defRPr sz="4200" b="1">
                 <a:solidFill>
@@ -4006,13 +4019,20 @@
               </a:defRPr>
             </a:pPr>
             <a:r>
+              <a:rPr lang="en-CA"/>
               <a:t>GitHub Copilot</a:t>
             </a:r>
           </a:p>
           <a:p>
             <a:pPr>
-              <a:spcAft>
-                <a:spcPts val="600"/>
+              <a:lnSpc>
+                <a:spcPct val="104000"/>
+              </a:lnSpc>
+              <a:spcBef>
+                <a:spcPts val="0"/>
+              </a:spcBef>
+              <a:spcAft>
+                <a:spcPts val="0"/>
               </a:spcAft>
               <a:defRPr sz="4200" b="1">
                 <a:solidFill>
@@ -4022,6 +4042,7 @@
               </a:defRPr>
             </a:pPr>
             <a:r>
+              <a:rPr lang="en-CA"/>
               <a:t>for data scientists</a:t>
             </a:r>
           </a:p>
@@ -4035,7 +4056,7 @@
         </p:nvSpPr>
         <p:spPr>
           <a:xfrm>
-            <a:off x="640080" y="2880360"/>
+            <a:off x="640080" y="3154680"/>
             <a:ext cx="6263640" cy="822960"/>
           </a:xfrm>
           <a:prstGeom prst="rect">
@@ -4050,8 +4071,14 @@
           <a:lstStyle/>
           <a:p>
             <a:pPr>
-              <a:spcAft>
-                <a:spcPts val="600"/>
+              <a:lnSpc>
+                <a:spcPct val="104000"/>
+              </a:lnSpc>
+              <a:spcBef>
+                <a:spcPts val="0"/>
+              </a:spcBef>
+              <a:spcAft>
+                <a:spcPts val="0"/>
               </a:spcAft>
               <a:defRPr sz="2500" b="0">
                 <a:solidFill>
@@ -4061,13 +4088,20 @@
               </a:defRPr>
             </a:pPr>
             <a:r>
+              <a:rPr lang="en-CA"/>
               <a:t>Less boilerplate.</a:t>
             </a:r>
           </a:p>
           <a:p>
             <a:pPr>
-              <a:spcAft>
-                <a:spcPts val="600"/>
+              <a:lnSpc>
+                <a:spcPct val="104000"/>
+              </a:lnSpc>
+              <a:spcBef>
+                <a:spcPts val="0"/>
+              </a:spcBef>
+              <a:spcAft>
+                <a:spcPts val="0"/>
               </a:spcAft>
               <a:defRPr sz="2500" b="0">
                 <a:solidFill>
@@ -4077,6 +4111,7 @@
               </a:defRPr>
             </a:pPr>
             <a:r>
+              <a:rPr lang="en-CA"/>
               <a:t>More time for scientific judgment.</a:t>
             </a:r>
           </a:p>
@@ -4148,10 +4183,16 @@
           <a:lstStyle/>
           <a:p>
             <a:pPr>
-              <a:spcAft>
-                <a:spcPts val="600"/>
-              </a:spcAft>
-              <a:defRPr sz="2000" b="0">
+              <a:lnSpc>
+                <a:spcPct val="104000"/>
+              </a:lnSpc>
+              <a:spcBef>
+                <a:spcPts val="0"/>
+              </a:spcBef>
+              <a:spcAft>
+                <a:spcPts val="0"/>
+              </a:spcAft>
+              <a:defRPr sz="1900" b="0">
                 <a:solidFill>
                   <a:srgbClr val="FFFFFF"/>
                 </a:solidFill>
@@ -4159,15 +4200,22 @@
               </a:defRPr>
             </a:pPr>
             <a:r>
+              <a:rPr lang="en-CA"/>
               <a:t>Complete code. Ask better questions.</a:t>
             </a:r>
           </a:p>
           <a:p>
             <a:pPr>
-              <a:spcAft>
-                <a:spcPts val="600"/>
-              </a:spcAft>
-              <a:defRPr sz="2000" b="0">
+              <a:lnSpc>
+                <a:spcPct val="104000"/>
+              </a:lnSpc>
+              <a:spcBef>
+                <a:spcPts val="0"/>
+              </a:spcBef>
+              <a:spcAft>
+                <a:spcPts val="0"/>
+              </a:spcAft>
+              <a:defRPr sz="1900" b="0">
                 <a:solidFill>
                   <a:srgbClr val="FFFFFF"/>
                 </a:solidFill>
@@ -4175,6 +4223,7 @@
               </a:defRPr>
             </a:pPr>
             <a:r>
+              <a:rPr lang="en-CA"/>
               <a:t>Delegate bounded work, then verify.</a:t>
             </a:r>
           </a:p>
@@ -4203,8 +4252,14 @@
           <a:lstStyle/>
           <a:p>
             <a:pPr>
-              <a:spcAft>
-                <a:spcPts val="600"/>
+              <a:lnSpc>
+                <a:spcPct val="104000"/>
+              </a:lnSpc>
+              <a:spcBef>
+                <a:spcPts val="0"/>
+              </a:spcBef>
+              <a:spcAft>
+                <a:spcPts val="0"/>
               </a:spcAft>
               <a:defRPr sz="1400" b="0">
                 <a:solidFill>
@@ -4214,6 +4269,7 @@
               </a:defRPr>
             </a:pPr>
             <a:r>
+              <a:rPr lang="en-CA"/>
               <a:t>A practical briefing for Desjardins teams</a:t>
             </a:r>
           </a:p>
@@ -4287,8 +4343,14 @@
           <a:lstStyle/>
           <a:p>
             <a:pPr>
-              <a:spcAft>
-                <a:spcPts val="600"/>
+              <a:lnSpc>
+                <a:spcPct val="104000"/>
+              </a:lnSpc>
+              <a:spcBef>
+                <a:spcPts val="0"/>
+              </a:spcBef>
+              <a:spcAft>
+                <a:spcPts val="0"/>
               </a:spcAft>
               <a:defRPr sz="1100" b="1">
                 <a:solidFill>
@@ -4298,6 +4360,7 @@
               </a:defRPr>
             </a:pPr>
             <a:r>
+              <a:rPr lang="en-CA"/>
               <a:t>ONE WORKSPACE</a:t>
             </a:r>
           </a:p>
@@ -4371,8 +4434,14 @@
           <a:lstStyle/>
           <a:p>
             <a:pPr>
-              <a:spcAft>
-                <a:spcPts val="600"/>
+              <a:lnSpc>
+                <a:spcPct val="104000"/>
+              </a:lnSpc>
+              <a:spcBef>
+                <a:spcPts val="0"/>
+              </a:spcBef>
+              <a:spcAft>
+                <a:spcPts val="0"/>
               </a:spcAft>
               <a:defRPr sz="1400" b="1">
                 <a:solidFill>
@@ -4382,6 +4451,7 @@
               </a:defRPr>
             </a:pPr>
             <a:r>
+              <a:rPr lang="en-CA"/>
               <a:t>01</a:t>
             </a:r>
           </a:p>
@@ -4410,8 +4480,14 @@
           <a:lstStyle/>
           <a:p>
             <a:pPr>
-              <a:spcAft>
-                <a:spcPts val="600"/>
+              <a:lnSpc>
+                <a:spcPct val="104000"/>
+              </a:lnSpc>
+              <a:spcBef>
+                <a:spcPts val="0"/>
+              </a:spcBef>
+              <a:spcAft>
+                <a:spcPts val="0"/>
               </a:spcAft>
               <a:defRPr sz="2300" b="1">
                 <a:solidFill>
@@ -4421,6 +4497,7 @@
               </a:defRPr>
             </a:pPr>
             <a:r>
+              <a:rPr lang="en-CA"/>
               <a:t>Explore</a:t>
             </a:r>
           </a:p>
@@ -4449,8 +4526,14 @@
           <a:lstStyle/>
           <a:p>
             <a:pPr>
-              <a:spcAft>
-                <a:spcPts val="600"/>
+              <a:lnSpc>
+                <a:spcPct val="104000"/>
+              </a:lnSpc>
+              <a:spcBef>
+                <a:spcPts val="0"/>
+              </a:spcBef>
+              <a:spcAft>
+                <a:spcPts val="0"/>
               </a:spcAft>
               <a:defRPr sz="1400" b="0">
                 <a:solidFill>
@@ -4460,6 +4543,7 @@
               </a:defRPr>
             </a:pPr>
             <a:r>
+              <a:rPr lang="en-CA"/>
               <a:t>Understand data and assumptions</a:t>
             </a:r>
           </a:p>
@@ -4533,8 +4617,14 @@
           <a:lstStyle/>
           <a:p>
             <a:pPr>
-              <a:spcAft>
-                <a:spcPts val="600"/>
+              <a:lnSpc>
+                <a:spcPct val="104000"/>
+              </a:lnSpc>
+              <a:spcBef>
+                <a:spcPts val="0"/>
+              </a:spcBef>
+              <a:spcAft>
+                <a:spcPts val="0"/>
               </a:spcAft>
               <a:defRPr sz="1400" b="1">
                 <a:solidFill>
@@ -4544,6 +4634,7 @@
               </a:defRPr>
             </a:pPr>
             <a:r>
+              <a:rPr lang="en-CA"/>
               <a:t>02</a:t>
             </a:r>
           </a:p>
@@ -4572,8 +4663,14 @@
           <a:lstStyle/>
           <a:p>
             <a:pPr>
-              <a:spcAft>
-                <a:spcPts val="600"/>
+              <a:lnSpc>
+                <a:spcPct val="104000"/>
+              </a:lnSpc>
+              <a:spcBef>
+                <a:spcPts val="0"/>
+              </a:spcBef>
+              <a:spcAft>
+                <a:spcPts val="0"/>
               </a:spcAft>
               <a:defRPr sz="2300" b="1">
                 <a:solidFill>
@@ -4583,6 +4680,7 @@
               </a:defRPr>
             </a:pPr>
             <a:r>
+              <a:rPr lang="en-CA"/>
               <a:t>Experiment</a:t>
             </a:r>
           </a:p>
@@ -4611,8 +4709,14 @@
           <a:lstStyle/>
           <a:p>
             <a:pPr>
-              <a:spcAft>
-                <a:spcPts val="600"/>
+              <a:lnSpc>
+                <a:spcPct val="104000"/>
+              </a:lnSpc>
+              <a:spcBef>
+                <a:spcPts val="0"/>
+              </a:spcBef>
+              <a:spcAft>
+                <a:spcPts val="0"/>
               </a:spcAft>
               <a:defRPr sz="1400" b="0">
                 <a:solidFill>
@@ -4622,6 +4726,7 @@
               </a:defRPr>
             </a:pPr>
             <a:r>
+              <a:rPr lang="en-CA"/>
               <a:t>Build and compare reproducible baselines</a:t>
             </a:r>
           </a:p>
@@ -4695,8 +4800,14 @@
           <a:lstStyle/>
           <a:p>
             <a:pPr>
-              <a:spcAft>
-                <a:spcPts val="600"/>
+              <a:lnSpc>
+                <a:spcPct val="104000"/>
+              </a:lnSpc>
+              <a:spcBef>
+                <a:spcPts val="0"/>
+              </a:spcBef>
+              <a:spcAft>
+                <a:spcPts val="0"/>
               </a:spcAft>
               <a:defRPr sz="1400" b="1">
                 <a:solidFill>
@@ -4706,6 +4817,7 @@
               </a:defRPr>
             </a:pPr>
             <a:r>
+              <a:rPr lang="en-CA"/>
               <a:t>03</a:t>
             </a:r>
           </a:p>
@@ -4734,8 +4846,14 @@
           <a:lstStyle/>
           <a:p>
             <a:pPr>
-              <a:spcAft>
-                <a:spcPts val="600"/>
+              <a:lnSpc>
+                <a:spcPct val="104000"/>
+              </a:lnSpc>
+              <a:spcBef>
+                <a:spcPts val="0"/>
+              </a:spcBef>
+              <a:spcAft>
+                <a:spcPts val="0"/>
               </a:spcAft>
               <a:defRPr sz="2300" b="1">
                 <a:solidFill>
@@ -4745,6 +4863,7 @@
               </a:defRPr>
             </a:pPr>
             <a:r>
+              <a:rPr lang="en-CA"/>
               <a:t>Validate</a:t>
             </a:r>
           </a:p>
@@ -4773,8 +4892,14 @@
           <a:lstStyle/>
           <a:p>
             <a:pPr>
-              <a:spcAft>
-                <a:spcPts val="600"/>
+              <a:lnSpc>
+                <a:spcPct val="104000"/>
+              </a:lnSpc>
+              <a:spcBef>
+                <a:spcPts val="0"/>
+              </a:spcBef>
+              <a:spcAft>
+                <a:spcPts val="0"/>
               </a:spcAft>
               <a:defRPr sz="1400" b="0">
                 <a:solidFill>
@@ -4784,6 +4909,7 @@
               </a:defRPr>
             </a:pPr>
             <a:r>
+              <a:rPr lang="en-CA"/>
               <a:t>Test code, metrics and leakage risks</a:t>
             </a:r>
           </a:p>
@@ -4812,8 +4938,14 @@
           <a:lstStyle/>
           <a:p>
             <a:pPr>
-              <a:spcAft>
-                <a:spcPts val="600"/>
+              <a:lnSpc>
+                <a:spcPct val="104000"/>
+              </a:lnSpc>
+              <a:spcBef>
+                <a:spcPts val="0"/>
+              </a:spcBef>
+              <a:spcAft>
+                <a:spcPts val="0"/>
               </a:spcAft>
               <a:defRPr sz="800" b="0">
                 <a:solidFill>
@@ -4823,6 +4955,7 @@
               </a:defRPr>
             </a:pPr>
             <a:r>
+              <a:rPr lang="en-CA"/>
               <a:t>DESJARDINS-INSPIRED  /  GITHUB COPILOT FOR DATA SCIENCE</a:t>
             </a:r>
           </a:p>
@@ -4851,8 +4984,14 @@
           <a:lstStyle/>
           <a:p>
             <a:pPr>
-              <a:spcAft>
-                <a:spcPts val="600"/>
+              <a:lnSpc>
+                <a:spcPct val="104000"/>
+              </a:lnSpc>
+              <a:spcBef>
+                <a:spcPts val="0"/>
+              </a:spcBef>
+              <a:spcAft>
+                <a:spcPts val="0"/>
               </a:spcAft>
               <a:defRPr sz="900" b="1">
                 <a:solidFill>
@@ -4862,6 +5001,7 @@
               </a:defRPr>
             </a:pPr>
             <a:r>
+              <a:rPr lang="en-CA"/>
               <a:t>01 / 05</a:t>
             </a:r>
           </a:p>
@@ -4959,8 +5099,14 @@
           <a:lstStyle/>
           <a:p>
             <a:pPr>
-              <a:spcAft>
-                <a:spcPts val="600"/>
+              <a:lnSpc>
+                <a:spcPct val="104000"/>
+              </a:lnSpc>
+              <a:spcBef>
+                <a:spcPts val="0"/>
+              </a:spcBef>
+              <a:spcAft>
+                <a:spcPts val="0"/>
               </a:spcAft>
               <a:defRPr sz="1100" b="1">
                 <a:solidFill>
@@ -4970,6 +5116,7 @@
               </a:defRPr>
             </a:pPr>
             <a:r>
+              <a:rPr lang="en-CA"/>
               <a:t>GITHUB COPILOT  /  VS CODE</a:t>
             </a:r>
           </a:p>
@@ -4998,8 +5145,14 @@
           <a:lstStyle/>
           <a:p>
             <a:pPr>
-              <a:spcAft>
-                <a:spcPts val="600"/>
+              <a:lnSpc>
+                <a:spcPct val="104000"/>
+              </a:lnSpc>
+              <a:spcBef>
+                <a:spcPts val="0"/>
+              </a:spcBef>
+              <a:spcAft>
+                <a:spcPts val="0"/>
               </a:spcAft>
               <a:defRPr sz="3100" b="1">
                 <a:solidFill>
@@ -5009,6 +5162,7 @@
               </a:defRPr>
             </a:pPr>
             <a:r>
+              <a:rPr lang="en-CA"/>
               <a:t>Three ways to work with Copilot</a:t>
             </a:r>
           </a:p>
@@ -5037,8 +5191,14 @@
           <a:lstStyle/>
           <a:p>
             <a:pPr>
-              <a:spcAft>
-                <a:spcPts val="600"/>
+              <a:lnSpc>
+                <a:spcPct val="104000"/>
+              </a:lnSpc>
+              <a:spcBef>
+                <a:spcPts val="0"/>
+              </a:spcBef>
+              <a:spcAft>
+                <a:spcPts val="0"/>
               </a:spcAft>
               <a:defRPr sz="1700" b="0">
                 <a:solidFill>
@@ -5048,6 +5208,7 @@
               </a:defRPr>
             </a:pPr>
             <a:r>
+              <a:rPr lang="en-CA"/>
               <a:t>Choose the interaction by how much work you want to delegate.</a:t>
             </a:r>
           </a:p>
@@ -5076,8 +5237,14 @@
           <a:lstStyle/>
           <a:p>
             <a:pPr>
-              <a:spcAft>
-                <a:spcPts val="600"/>
+              <a:lnSpc>
+                <a:spcPct val="104000"/>
+              </a:lnSpc>
+              <a:spcBef>
+                <a:spcPts val="0"/>
+              </a:spcBef>
+              <a:spcAft>
+                <a:spcPts val="0"/>
               </a:spcAft>
               <a:defRPr sz="800" b="0">
                 <a:solidFill>
@@ -5087,6 +5254,7 @@
               </a:defRPr>
             </a:pPr>
             <a:r>
+              <a:rPr lang="en-CA"/>
               <a:t>DESJARDINS-INSPIRED  /  GITHUB COPILOT FOR DATA SCIENCE</a:t>
             </a:r>
           </a:p>
@@ -5115,8 +5283,14 @@
           <a:lstStyle/>
           <a:p>
             <a:pPr>
-              <a:spcAft>
-                <a:spcPts val="600"/>
+              <a:lnSpc>
+                <a:spcPct val="104000"/>
+              </a:lnSpc>
+              <a:spcBef>
+                <a:spcPts val="0"/>
+              </a:spcBef>
+              <a:spcAft>
+                <a:spcPts val="0"/>
               </a:spcAft>
               <a:defRPr sz="900" b="0">
                 <a:solidFill>
@@ -5126,7 +5300,7 @@
               </a:defRPr>
             </a:pPr>
             <a:r>
-              <a:rPr>
+              <a:rPr lang="en-CA">
                 <a:hlinkClick r:id="rId2"/>
               </a:rPr>
               <a:t>Source / reference</a:t>
@@ -5157,8 +5331,14 @@
           <a:lstStyle/>
           <a:p>
             <a:pPr>
-              <a:spcAft>
-                <a:spcPts val="600"/>
+              <a:lnSpc>
+                <a:spcPct val="104000"/>
+              </a:lnSpc>
+              <a:spcBef>
+                <a:spcPts val="0"/>
+              </a:spcBef>
+              <a:spcAft>
+                <a:spcPts val="0"/>
               </a:spcAft>
               <a:defRPr sz="900" b="1">
                 <a:solidFill>
@@ -5168,6 +5348,7 @@
               </a:defRPr>
             </a:pPr>
             <a:r>
+              <a:rPr lang="en-CA"/>
               <a:t>02 / 05</a:t>
             </a:r>
           </a:p>
@@ -5243,8 +5424,14 @@
           <a:lstStyle/>
           <a:p>
             <a:pPr>
-              <a:spcAft>
-                <a:spcPts val="600"/>
+              <a:lnSpc>
+                <a:spcPct val="104000"/>
+              </a:lnSpc>
+              <a:spcBef>
+                <a:spcPts val="0"/>
+              </a:spcBef>
+              <a:spcAft>
+                <a:spcPts val="0"/>
               </a:spcAft>
               <a:defRPr sz="1100" b="1">
                 <a:solidFill>
@@ -5254,6 +5441,7 @@
               </a:defRPr>
             </a:pPr>
             <a:r>
+              <a:rPr lang="en-CA"/>
               <a:t>01 / COMPLETION</a:t>
             </a:r>
           </a:p>
@@ -5268,7 +5456,7 @@
         <p:spPr>
           <a:xfrm>
             <a:off x="758952" y="2971800"/>
-            <a:ext cx="3035808" cy="438912"/>
+            <a:ext cx="3035808" cy="457200"/>
           </a:xfrm>
           <a:prstGeom prst="rect">
             <a:avLst/>
@@ -5282,8 +5470,14 @@
           <a:lstStyle/>
           <a:p>
             <a:pPr>
-              <a:spcAft>
-                <a:spcPts val="600"/>
+              <a:lnSpc>
+                <a:spcPct val="104000"/>
+              </a:lnSpc>
+              <a:spcBef>
+                <a:spcPts val="0"/>
+              </a:spcBef>
+              <a:spcAft>
+                <a:spcPts val="0"/>
               </a:spcAft>
               <a:defRPr sz="2700" b="1">
                 <a:solidFill>
@@ -5293,6 +5487,7 @@
               </a:defRPr>
             </a:pPr>
             <a:r>
+              <a:rPr lang="en-CA"/>
               <a:t>Keep typing</a:t>
             </a:r>
           </a:p>
@@ -5321,8 +5516,14 @@
           <a:lstStyle/>
           <a:p>
             <a:pPr>
-              <a:spcAft>
-                <a:spcPts val="600"/>
+              <a:lnSpc>
+                <a:spcPct val="104000"/>
+              </a:lnSpc>
+              <a:spcBef>
+                <a:spcPts val="0"/>
+              </a:spcBef>
+              <a:spcAft>
+                <a:spcPts val="0"/>
               </a:spcAft>
               <a:defRPr sz="1300" b="1">
                 <a:solidFill>
@@ -5332,6 +5533,7 @@
               </a:defRPr>
             </a:pPr>
             <a:r>
+              <a:rPr lang="en-CA"/>
               <a:t>Inline suggestions</a:t>
             </a:r>
           </a:p>
@@ -5345,8 +5547,8 @@
         </p:nvSpPr>
         <p:spPr>
           <a:xfrm>
-            <a:off x="758952" y="3904487"/>
-            <a:ext cx="3035808" cy="740664"/>
+            <a:off x="758952" y="3822191"/>
+            <a:ext cx="3035808" cy="941832"/>
           </a:xfrm>
           <a:prstGeom prst="rect">
             <a:avLst/>
@@ -5360,8 +5562,14 @@
           <a:lstStyle/>
           <a:p>
             <a:pPr>
-              <a:spcAft>
-                <a:spcPts val="600"/>
+              <a:lnSpc>
+                <a:spcPct val="104000"/>
+              </a:lnSpc>
+              <a:spcBef>
+                <a:spcPts val="0"/>
+              </a:spcBef>
+              <a:spcAft>
+                <a:spcPts val="0"/>
               </a:spcAft>
               <a:defRPr sz="1800" b="0">
                 <a:solidFill>
@@ -5371,13 +5579,20 @@
               </a:defRPr>
             </a:pPr>
             <a:r>
-              <a:t>Finish a pandas transform,</a:t>
-            </a:r>
-          </a:p>
-          <a:p>
-            <a:pPr>
-              <a:spcAft>
-                <a:spcPts val="600"/>
+              <a:rPr lang="en-CA"/>
+              <a:t>Finish pandas transforms,</a:t>
+            </a:r>
+          </a:p>
+          <a:p>
+            <a:pPr>
+              <a:lnSpc>
+                <a:spcPct val="104000"/>
+              </a:lnSpc>
+              <a:spcBef>
+                <a:spcPts val="0"/>
+              </a:spcBef>
+              <a:spcAft>
+                <a:spcPts val="0"/>
               </a:spcAft>
               <a:defRPr sz="1800" b="0">
                 <a:solidFill>
@@ -5387,7 +5602,8 @@
               </a:defRPr>
             </a:pPr>
             <a:r>
-              <a:t>a SQL query or a test assertion.</a:t>
+              <a:rPr lang="en-CA"/>
+              <a:t>SQL queries and test assertions.</a:t>
             </a:r>
           </a:p>
         </p:txBody>
@@ -5400,7 +5616,7 @@
         </p:nvSpPr>
         <p:spPr>
           <a:xfrm>
-            <a:off x="758952" y="4782312"/>
+            <a:off x="758952" y="4846320"/>
             <a:ext cx="3035808" cy="329184"/>
           </a:xfrm>
           <a:prstGeom prst="rect">
@@ -5415,8 +5631,14 @@
           <a:lstStyle/>
           <a:p>
             <a:pPr>
-              <a:spcAft>
-                <a:spcPts val="600"/>
+              <a:lnSpc>
+                <a:spcPct val="104000"/>
+              </a:lnSpc>
+              <a:spcBef>
+                <a:spcPts val="0"/>
+              </a:spcBef>
+              <a:spcAft>
+                <a:spcPts val="0"/>
               </a:spcAft>
               <a:defRPr sz="1300" b="1">
                 <a:solidFill>
@@ -5426,6 +5648,7 @@
               </a:defRPr>
             </a:pPr>
             <a:r>
+              <a:rPr lang="en-CA"/>
               <a:t>You steer every edit.</a:t>
             </a:r>
           </a:p>
@@ -5497,10 +5720,16 @@
           <a:lstStyle/>
           <a:p>
             <a:pPr>
-              <a:spcAft>
-                <a:spcPts val="600"/>
-              </a:spcAft>
-              <a:defRPr sz="1100" b="0">
+              <a:lnSpc>
+                <a:spcPct val="104000"/>
+              </a:lnSpc>
+              <a:spcBef>
+                <a:spcPts val="0"/>
+              </a:spcBef>
+              <a:spcAft>
+                <a:spcPts val="0"/>
+              </a:spcAft>
+              <a:defRPr sz="1050" b="0">
                 <a:solidFill>
                   <a:srgbClr val="526B60"/>
                 </a:solidFill>
@@ -5508,15 +5737,22 @@
               </a:defRPr>
             </a:pPr>
             <a:r>
+              <a:rPr lang="en-CA"/>
               <a:t># aggregate transactions</a:t>
             </a:r>
           </a:p>
           <a:p>
             <a:pPr>
-              <a:spcAft>
-                <a:spcPts val="600"/>
-              </a:spcAft>
-              <a:defRPr sz="1100" b="0">
+              <a:lnSpc>
+                <a:spcPct val="104000"/>
+              </a:lnSpc>
+              <a:spcBef>
+                <a:spcPts val="0"/>
+              </a:spcBef>
+              <a:spcAft>
+                <a:spcPts val="0"/>
+              </a:spcAft>
+              <a:defRPr sz="1050" b="0">
                 <a:solidFill>
                   <a:srgbClr val="526B60"/>
                 </a:solidFill>
@@ -5524,6 +5760,7 @@
               </a:defRPr>
             </a:pPr>
             <a:r>
+              <a:rPr lang="en-CA"/>
               <a:t># by customer and month</a:t>
             </a:r>
           </a:p>
@@ -5599,8 +5836,14 @@
           <a:lstStyle/>
           <a:p>
             <a:pPr>
-              <a:spcAft>
-                <a:spcPts val="600"/>
+              <a:lnSpc>
+                <a:spcPct val="104000"/>
+              </a:lnSpc>
+              <a:spcBef>
+                <a:spcPts val="0"/>
+              </a:spcBef>
+              <a:spcAft>
+                <a:spcPts val="0"/>
               </a:spcAft>
               <a:defRPr sz="1100" b="1">
                 <a:solidFill>
@@ -5610,6 +5853,7 @@
               </a:defRPr>
             </a:pPr>
             <a:r>
+              <a:rPr lang="en-CA"/>
               <a:t>02 / ASK</a:t>
             </a:r>
           </a:p>
@@ -5624,7 +5868,7 @@
         <p:spPr>
           <a:xfrm>
             <a:off x="4572000" y="2971800"/>
-            <a:ext cx="3035808" cy="438912"/>
+            <a:ext cx="3035808" cy="457200"/>
           </a:xfrm>
           <a:prstGeom prst="rect">
             <a:avLst/>
@@ -5638,8 +5882,14 @@
           <a:lstStyle/>
           <a:p>
             <a:pPr>
-              <a:spcAft>
-                <a:spcPts val="600"/>
+              <a:lnSpc>
+                <a:spcPct val="104000"/>
+              </a:lnSpc>
+              <a:spcBef>
+                <a:spcPts val="0"/>
+              </a:spcBef>
+              <a:spcAft>
+                <a:spcPts val="0"/>
               </a:spcAft>
               <a:defRPr sz="2700" b="1">
                 <a:solidFill>
@@ -5649,6 +5899,7 @@
               </a:defRPr>
             </a:pPr>
             <a:r>
+              <a:rPr lang="en-CA"/>
               <a:t>Think it through</a:t>
             </a:r>
           </a:p>
@@ -5677,8 +5928,14 @@
           <a:lstStyle/>
           <a:p>
             <a:pPr>
-              <a:spcAft>
-                <a:spcPts val="600"/>
+              <a:lnSpc>
+                <a:spcPct val="104000"/>
+              </a:lnSpc>
+              <a:spcBef>
+                <a:spcPts val="0"/>
+              </a:spcBef>
+              <a:spcAft>
+                <a:spcPts val="0"/>
               </a:spcAft>
               <a:defRPr sz="1300" b="1">
                 <a:solidFill>
@@ -5688,6 +5945,7 @@
               </a:defRPr>
             </a:pPr>
             <a:r>
+              <a:rPr lang="en-CA"/>
               <a:t>Conversational help</a:t>
             </a:r>
           </a:p>
@@ -5701,8 +5959,8 @@
         </p:nvSpPr>
         <p:spPr>
           <a:xfrm>
-            <a:off x="4572000" y="3904487"/>
-            <a:ext cx="3035808" cy="740664"/>
+            <a:off x="4572000" y="3822191"/>
+            <a:ext cx="3035808" cy="941832"/>
           </a:xfrm>
           <a:prstGeom prst="rect">
             <a:avLst/>
@@ -5716,8 +5974,14 @@
           <a:lstStyle/>
           <a:p>
             <a:pPr>
-              <a:spcAft>
-                <a:spcPts val="600"/>
+              <a:lnSpc>
+                <a:spcPct val="104000"/>
+              </a:lnSpc>
+              <a:spcBef>
+                <a:spcPts val="0"/>
+              </a:spcBef>
+              <a:spcAft>
+                <a:spcPts val="0"/>
               </a:spcAft>
               <a:defRPr sz="1800" b="0">
                 <a:solidFill>
@@ -5727,13 +5991,20 @@
               </a:defRPr>
             </a:pPr>
             <a:r>
+              <a:rPr lang="en-CA"/>
               <a:t>Explain a notebook, compare</a:t>
             </a:r>
           </a:p>
           <a:p>
             <a:pPr>
-              <a:spcAft>
-                <a:spcPts val="600"/>
+              <a:lnSpc>
+                <a:spcPct val="104000"/>
+              </a:lnSpc>
+              <a:spcBef>
+                <a:spcPts val="0"/>
+              </a:spcBef>
+              <a:spcAft>
+                <a:spcPts val="0"/>
               </a:spcAft>
               <a:defRPr sz="1800" b="0">
                 <a:solidFill>
@@ -5743,6 +6014,7 @@
               </a:defRPr>
             </a:pPr>
             <a:r>
+              <a:rPr lang="en-CA"/>
               <a:t>metrics or challenge a split.</a:t>
             </a:r>
           </a:p>
@@ -5756,7 +6028,7 @@
         </p:nvSpPr>
         <p:spPr>
           <a:xfrm>
-            <a:off x="4572000" y="4782312"/>
+            <a:off x="4572000" y="4846320"/>
             <a:ext cx="3035808" cy="329184"/>
           </a:xfrm>
           <a:prstGeom prst="rect">
@@ -5771,8 +6043,14 @@
           <a:lstStyle/>
           <a:p>
             <a:pPr>
-              <a:spcAft>
-                <a:spcPts val="600"/>
+              <a:lnSpc>
+                <a:spcPct val="104000"/>
+              </a:lnSpc>
+              <a:spcBef>
+                <a:spcPts val="0"/>
+              </a:spcBef>
+              <a:spcAft>
+                <a:spcPts val="0"/>
               </a:spcAft>
               <a:defRPr sz="1300" b="1">
                 <a:solidFill>
@@ -5782,6 +6060,7 @@
               </a:defRPr>
             </a:pPr>
             <a:r>
+              <a:rPr lang="en-CA"/>
               <a:t>Advice first; apply deliberately.</a:t>
             </a:r>
           </a:p>
@@ -5853,10 +6132,16 @@
           <a:lstStyle/>
           <a:p>
             <a:pPr>
-              <a:spcAft>
-                <a:spcPts val="600"/>
-              </a:spcAft>
-              <a:defRPr sz="1100" b="0">
+              <a:lnSpc>
+                <a:spcPct val="104000"/>
+              </a:lnSpc>
+              <a:spcBef>
+                <a:spcPts val="0"/>
+              </a:spcBef>
+              <a:spcAft>
+                <a:spcPts val="0"/>
+              </a:spcAft>
+              <a:defRPr sz="1050" b="0">
                 <a:solidFill>
                   <a:srgbClr val="526B60"/>
                 </a:solidFill>
@@ -5864,15 +6149,22 @@
               </a:defRPr>
             </a:pPr>
             <a:r>
+              <a:rPr lang="en-CA"/>
               <a:t>"Could this feature leak</a:t>
             </a:r>
           </a:p>
           <a:p>
             <a:pPr>
-              <a:spcAft>
-                <a:spcPts val="600"/>
-              </a:spcAft>
-              <a:defRPr sz="1100" b="0">
+              <a:lnSpc>
+                <a:spcPct val="104000"/>
+              </a:lnSpc>
+              <a:spcBef>
+                <a:spcPts val="0"/>
+              </a:spcBef>
+              <a:spcAft>
+                <a:spcPts val="0"/>
+              </a:spcAft>
+              <a:defRPr sz="1050" b="0">
                 <a:solidFill>
                   <a:srgbClr val="526B60"/>
                 </a:solidFill>
@@ -5880,6 +6172,7 @@
               </a:defRPr>
             </a:pPr>
             <a:r>
+              <a:rPr lang="en-CA"/>
               <a:t>future information?"</a:t>
             </a:r>
           </a:p>
@@ -5955,8 +6248,14 @@
           <a:lstStyle/>
           <a:p>
             <a:pPr>
-              <a:spcAft>
-                <a:spcPts val="600"/>
+              <a:lnSpc>
+                <a:spcPct val="104000"/>
+              </a:lnSpc>
+              <a:spcBef>
+                <a:spcPts val="0"/>
+              </a:spcBef>
+              <a:spcAft>
+                <a:spcPts val="0"/>
               </a:spcAft>
               <a:defRPr sz="1100" b="1">
                 <a:solidFill>
@@ -5966,6 +6265,7 @@
               </a:defRPr>
             </a:pPr>
             <a:r>
+              <a:rPr lang="en-CA"/>
               <a:t>03 / AGENTIC</a:t>
             </a:r>
           </a:p>
@@ -5980,7 +6280,7 @@
         <p:spPr>
           <a:xfrm>
             <a:off x="8385048" y="2971800"/>
-            <a:ext cx="3035808" cy="438912"/>
+            <a:ext cx="3035808" cy="457200"/>
           </a:xfrm>
           <a:prstGeom prst="rect">
             <a:avLst/>
@@ -5994,8 +6294,14 @@
           <a:lstStyle/>
           <a:p>
             <a:pPr>
-              <a:spcAft>
-                <a:spcPts val="600"/>
+              <a:lnSpc>
+                <a:spcPct val="104000"/>
+              </a:lnSpc>
+              <a:spcBef>
+                <a:spcPts val="0"/>
+              </a:spcBef>
+              <a:spcAft>
+                <a:spcPts val="0"/>
               </a:spcAft>
               <a:defRPr sz="2700" b="1">
                 <a:solidFill>
@@ -6005,6 +6311,7 @@
               </a:defRPr>
             </a:pPr>
             <a:r>
+              <a:rPr lang="en-CA"/>
               <a:t>Delegate a task</a:t>
             </a:r>
           </a:p>
@@ -6033,8 +6340,14 @@
           <a:lstStyle/>
           <a:p>
             <a:pPr>
-              <a:spcAft>
-                <a:spcPts val="600"/>
+              <a:lnSpc>
+                <a:spcPct val="104000"/>
+              </a:lnSpc>
+              <a:spcBef>
+                <a:spcPts val="0"/>
+              </a:spcBef>
+              <a:spcAft>
+                <a:spcPts val="0"/>
               </a:spcAft>
               <a:defRPr sz="1300" b="1">
                 <a:solidFill>
@@ -6044,6 +6357,7 @@
               </a:defRPr>
             </a:pPr>
             <a:r>
+              <a:rPr lang="en-CA"/>
               <a:t>Agent + tools</a:t>
             </a:r>
           </a:p>
@@ -6057,8 +6371,8 @@
         </p:nvSpPr>
         <p:spPr>
           <a:xfrm>
-            <a:off x="8385048" y="3904487"/>
-            <a:ext cx="3035808" cy="740664"/>
+            <a:off x="8385048" y="3822191"/>
+            <a:ext cx="3035808" cy="941832"/>
           </a:xfrm>
           <a:prstGeom prst="rect">
             <a:avLst/>
@@ -6072,8 +6386,14 @@
           <a:lstStyle/>
           <a:p>
             <a:pPr>
-              <a:spcAft>
-                <a:spcPts val="600"/>
+              <a:lnSpc>
+                <a:spcPct val="104000"/>
+              </a:lnSpc>
+              <a:spcBef>
+                <a:spcPts val="0"/>
+              </a:spcBef>
+              <a:spcAft>
+                <a:spcPts val="0"/>
               </a:spcAft>
               <a:defRPr sz="1800" b="0">
                 <a:solidFill>
@@ -6083,13 +6403,20 @@
               </a:defRPr>
             </a:pPr>
             <a:r>
+              <a:rPr lang="en-CA"/>
               <a:t>Edit related files, run tests</a:t>
             </a:r>
           </a:p>
           <a:p>
             <a:pPr>
-              <a:spcAft>
-                <a:spcPts val="600"/>
+              <a:lnSpc>
+                <a:spcPct val="104000"/>
+              </a:lnSpc>
+              <a:spcBef>
+                <a:spcPts val="0"/>
+              </a:spcBef>
+              <a:spcAft>
+                <a:spcPts val="0"/>
               </a:spcAft>
               <a:defRPr sz="1800" b="0">
                 <a:solidFill>
@@ -6099,6 +6426,7 @@
               </a:defRPr>
             </a:pPr>
             <a:r>
+              <a:rPr lang="en-CA"/>
               <a:t>and iterate on a bounded task.</a:t>
             </a:r>
           </a:p>
@@ -6112,7 +6440,7 @@
         </p:nvSpPr>
         <p:spPr>
           <a:xfrm>
-            <a:off x="8385048" y="4782312"/>
+            <a:off x="8385048" y="4846320"/>
             <a:ext cx="3035808" cy="329184"/>
           </a:xfrm>
           <a:prstGeom prst="rect">
@@ -6127,8 +6455,14 @@
           <a:lstStyle/>
           <a:p>
             <a:pPr>
-              <a:spcAft>
-                <a:spcPts val="600"/>
+              <a:lnSpc>
+                <a:spcPct val="104000"/>
+              </a:lnSpc>
+              <a:spcBef>
+                <a:spcPts val="0"/>
+              </a:spcBef>
+              <a:spcAft>
+                <a:spcPts val="0"/>
               </a:spcAft>
               <a:defRPr sz="1300" b="1">
                 <a:solidFill>
@@ -6138,6 +6472,7 @@
               </a:defRPr>
             </a:pPr>
             <a:r>
+              <a:rPr lang="en-CA"/>
               <a:t>Review diffs and tool actions.</a:t>
             </a:r>
           </a:p>
@@ -6209,10 +6544,16 @@
           <a:lstStyle/>
           <a:p>
             <a:pPr>
-              <a:spcAft>
-                <a:spcPts val="600"/>
-              </a:spcAft>
-              <a:defRPr sz="1100" b="0">
+              <a:lnSpc>
+                <a:spcPct val="104000"/>
+              </a:lnSpc>
+              <a:spcBef>
+                <a:spcPts val="0"/>
+              </a:spcBef>
+              <a:spcAft>
+                <a:spcPts val="0"/>
+              </a:spcAft>
+              <a:defRPr sz="1050" b="0">
                 <a:solidFill>
                   <a:srgbClr val="526B60"/>
                 </a:solidFill>
@@ -6220,15 +6561,22 @@
               </a:defRPr>
             </a:pPr>
             <a:r>
+              <a:rPr lang="en-CA"/>
               <a:t>"Build a baseline pipeline</a:t>
             </a:r>
           </a:p>
           <a:p>
             <a:pPr>
-              <a:spcAft>
-                <a:spcPts val="600"/>
-              </a:spcAft>
-              <a:defRPr sz="1100" b="0">
+              <a:lnSpc>
+                <a:spcPct val="104000"/>
+              </a:lnSpc>
+              <a:spcBef>
+                <a:spcPts val="0"/>
+              </a:spcBef>
+              <a:spcAft>
+                <a:spcPts val="0"/>
+              </a:spcAft>
+              <a:defRPr sz="1050" b="0">
                 <a:solidFill>
                   <a:srgbClr val="526B60"/>
                 </a:solidFill>
@@ -6236,6 +6584,7 @@
               </a:defRPr>
             </a:pPr>
             <a:r>
+              <a:rPr lang="en-CA"/>
               <a:t>and run its unit tests."</a:t>
             </a:r>
           </a:p>
@@ -6264,8 +6613,14 @@
           <a:lstStyle/>
           <a:p>
             <a:pPr>
-              <a:spcAft>
-                <a:spcPts val="600"/>
+              <a:lnSpc>
+                <a:spcPct val="104000"/>
+              </a:lnSpc>
+              <a:spcBef>
+                <a:spcPts val="0"/>
+              </a:spcBef>
+              <a:spcAft>
+                <a:spcPts val="0"/>
               </a:spcAft>
               <a:defRPr sz="1300" b="0">
                 <a:solidFill>
@@ -6275,6 +6630,7 @@
               </a:defRPr>
             </a:pPr>
             <a:r>
+              <a:rPr lang="en-CA"/>
               <a:t>More autonomy does not mean less accountability. Keep context scoped and permissions intentional.</a:t>
             </a:r>
           </a:p>
@@ -6372,8 +6728,14 @@
           <a:lstStyle/>
           <a:p>
             <a:pPr>
-              <a:spcAft>
-                <a:spcPts val="600"/>
+              <a:lnSpc>
+                <a:spcPct val="104000"/>
+              </a:lnSpc>
+              <a:spcBef>
+                <a:spcPts val="0"/>
+              </a:spcBef>
+              <a:spcAft>
+                <a:spcPts val="0"/>
               </a:spcAft>
               <a:defRPr sz="1100" b="1">
                 <a:solidFill>
@@ -6383,6 +6745,7 @@
               </a:defRPr>
             </a:pPr>
             <a:r>
+              <a:rPr lang="en-CA"/>
               <a:t>GITHUB COPILOT  /  VS CODE</a:t>
             </a:r>
           </a:p>
@@ -6411,8 +6774,14 @@
           <a:lstStyle/>
           <a:p>
             <a:pPr>
-              <a:spcAft>
-                <a:spcPts val="600"/>
+              <a:lnSpc>
+                <a:spcPct val="104000"/>
+              </a:lnSpc>
+              <a:spcBef>
+                <a:spcPts val="0"/>
+              </a:spcBef>
+              <a:spcAft>
+                <a:spcPts val="0"/>
               </a:spcAft>
               <a:defRPr sz="3100" b="1">
                 <a:solidFill>
@@ -6422,6 +6791,7 @@
               </a:defRPr>
             </a:pPr>
             <a:r>
+              <a:rPr lang="en-CA"/>
               <a:t>RPI: turn a question into verified work</a:t>
             </a:r>
           </a:p>
@@ -6450,8 +6820,14 @@
           <a:lstStyle/>
           <a:p>
             <a:pPr>
-              <a:spcAft>
-                <a:spcPts val="600"/>
+              <a:lnSpc>
+                <a:spcPct val="104000"/>
+              </a:lnSpc>
+              <a:spcBef>
+                <a:spcPts val="0"/>
+              </a:spcBef>
+              <a:spcAft>
+                <a:spcPts val="0"/>
               </a:spcAft>
               <a:defRPr sz="1700" b="0">
                 <a:solidFill>
@@ -6461,6 +6837,7 @@
               </a:defRPr>
             </a:pPr>
             <a:r>
+              <a:rPr lang="en-CA"/>
               <a:t>HVE Core on GitHub: Research -&gt; Plan -&gt; Implement, with review and follow-up.</a:t>
             </a:r>
           </a:p>
@@ -6489,8 +6866,14 @@
           <a:lstStyle/>
           <a:p>
             <a:pPr>
-              <a:spcAft>
-                <a:spcPts val="600"/>
+              <a:lnSpc>
+                <a:spcPct val="104000"/>
+              </a:lnSpc>
+              <a:spcBef>
+                <a:spcPts val="0"/>
+              </a:spcBef>
+              <a:spcAft>
+                <a:spcPts val="0"/>
               </a:spcAft>
               <a:defRPr sz="800" b="0">
                 <a:solidFill>
@@ -6500,6 +6883,7 @@
               </a:defRPr>
             </a:pPr>
             <a:r>
+              <a:rPr lang="en-CA"/>
               <a:t>DESJARDINS-INSPIRED  /  GITHUB COPILOT FOR DATA SCIENCE</a:t>
             </a:r>
           </a:p>
@@ -6528,8 +6912,14 @@
           <a:lstStyle/>
           <a:p>
             <a:pPr>
-              <a:spcAft>
-                <a:spcPts val="600"/>
+              <a:lnSpc>
+                <a:spcPct val="104000"/>
+              </a:lnSpc>
+              <a:spcBef>
+                <a:spcPts val="0"/>
+              </a:spcBef>
+              <a:spcAft>
+                <a:spcPts val="0"/>
               </a:spcAft>
               <a:defRPr sz="900" b="0">
                 <a:solidFill>
@@ -6539,7 +6929,7 @@
               </a:defRPr>
             </a:pPr>
             <a:r>
-              <a:rPr>
+              <a:rPr lang="en-CA">
                 <a:hlinkClick r:id="rId2"/>
               </a:rPr>
               <a:t>Source / reference</a:t>
@@ -6570,8 +6960,14 @@
           <a:lstStyle/>
           <a:p>
             <a:pPr>
-              <a:spcAft>
-                <a:spcPts val="600"/>
+              <a:lnSpc>
+                <a:spcPct val="104000"/>
+              </a:lnSpc>
+              <a:spcBef>
+                <a:spcPts val="0"/>
+              </a:spcBef>
+              <a:spcAft>
+                <a:spcPts val="0"/>
               </a:spcAft>
               <a:defRPr sz="900" b="1">
                 <a:solidFill>
@@ -6581,6 +6977,7 @@
               </a:defRPr>
             </a:pPr>
             <a:r>
+              <a:rPr lang="en-CA"/>
               <a:t>03 / 05</a:t>
             </a:r>
           </a:p>
@@ -6699,8 +7096,14 @@
           <a:lstStyle/>
           <a:p>
             <a:pPr>
-              <a:spcAft>
-                <a:spcPts val="600"/>
+              <a:lnSpc>
+                <a:spcPct val="104000"/>
+              </a:lnSpc>
+              <a:spcBef>
+                <a:spcPts val="0"/>
+              </a:spcBef>
+              <a:spcAft>
+                <a:spcPts val="0"/>
               </a:spcAft>
               <a:defRPr sz="1800" b="1">
                 <a:solidFill>
@@ -6710,6 +7113,7 @@
               </a:defRPr>
             </a:pPr>
             <a:r>
+              <a:rPr lang="en-CA"/>
               <a:t>R</a:t>
             </a:r>
           </a:p>
@@ -6738,8 +7142,14 @@
           <a:lstStyle/>
           <a:p>
             <a:pPr>
-              <a:spcAft>
-                <a:spcPts val="600"/>
+              <a:lnSpc>
+                <a:spcPct val="104000"/>
+              </a:lnSpc>
+              <a:spcBef>
+                <a:spcPts val="0"/>
+              </a:spcBef>
+              <a:spcAft>
+                <a:spcPts val="0"/>
               </a:spcAft>
               <a:defRPr sz="2600" b="1">
                 <a:solidFill>
@@ -6749,6 +7159,7 @@
               </a:defRPr>
             </a:pPr>
             <a:r>
+              <a:rPr lang="en-CA"/>
               <a:t>Research</a:t>
             </a:r>
           </a:p>
@@ -6777,8 +7188,14 @@
           <a:lstStyle/>
           <a:p>
             <a:pPr>
-              <a:spcAft>
-                <a:spcPts val="600"/>
+              <a:lnSpc>
+                <a:spcPct val="104000"/>
+              </a:lnSpc>
+              <a:spcBef>
+                <a:spcPts val="0"/>
+              </a:spcBef>
+              <a:spcAft>
+                <a:spcPts val="0"/>
               </a:spcAft>
               <a:defRPr sz="1400" b="1">
                 <a:solidFill>
@@ -6788,6 +7205,7 @@
               </a:defRPr>
             </a:pPr>
             <a:r>
+              <a:rPr lang="en-CA"/>
               <a:t>Understand before editing</a:t>
             </a:r>
           </a:p>
@@ -6816,10 +7234,16 @@
           <a:lstStyle/>
           <a:p>
             <a:pPr>
-              <a:spcAft>
-                <a:spcPts val="600"/>
-              </a:spcAft>
-              <a:defRPr sz="1700" b="0">
+              <a:lnSpc>
+                <a:spcPct val="104000"/>
+              </a:lnSpc>
+              <a:spcBef>
+                <a:spcPts val="0"/>
+              </a:spcBef>
+              <a:spcAft>
+                <a:spcPts val="0"/>
+              </a:spcAft>
+              <a:defRPr sz="1600" b="0">
                 <a:solidFill>
                   <a:srgbClr val="153A2D"/>
                 </a:solidFill>
@@ -6827,15 +7251,22 @@
               </a:defRPr>
             </a:pPr>
             <a:r>
+              <a:rPr lang="en-CA"/>
               <a:t>Inspect data contracts and code.</a:t>
             </a:r>
           </a:p>
           <a:p>
             <a:pPr>
-              <a:spcAft>
-                <a:spcPts val="600"/>
-              </a:spcAft>
-              <a:defRPr sz="1700" b="0">
+              <a:lnSpc>
+                <a:spcPct val="104000"/>
+              </a:lnSpc>
+              <a:spcBef>
+                <a:spcPts val="0"/>
+              </a:spcBef>
+              <a:spcAft>
+                <a:spcPts val="0"/>
+              </a:spcAft>
+              <a:defRPr sz="1600" b="0">
                 <a:solidFill>
                   <a:srgbClr val="153A2D"/>
                 </a:solidFill>
@@ -6843,15 +7274,22 @@
               </a:defRPr>
             </a:pPr>
             <a:r>
+              <a:rPr lang="en-CA"/>
               <a:t>Check leakage and alternatives.</a:t>
             </a:r>
           </a:p>
           <a:p>
             <a:pPr>
-              <a:spcAft>
-                <a:spcPts val="600"/>
-              </a:spcAft>
-              <a:defRPr sz="1700" b="0">
+              <a:lnSpc>
+                <a:spcPct val="104000"/>
+              </a:lnSpc>
+              <a:spcBef>
+                <a:spcPts val="0"/>
+              </a:spcBef>
+              <a:spcAft>
+                <a:spcPts val="0"/>
+              </a:spcAft>
+              <a:defRPr sz="1600" b="0">
                 <a:solidFill>
                   <a:srgbClr val="153A2D"/>
                 </a:solidFill>
@@ -6859,6 +7297,7 @@
               </a:defRPr>
             </a:pPr>
             <a:r>
+              <a:rPr lang="en-CA"/>
               <a:t>Separate evidence from assumptions.</a:t>
             </a:r>
           </a:p>
@@ -6872,7 +7311,7 @@
         </p:nvSpPr>
         <p:spPr>
           <a:xfrm>
-            <a:off x="758952" y="4892040"/>
+            <a:off x="758952" y="4956048"/>
             <a:ext cx="3054096" cy="265176"/>
           </a:xfrm>
           <a:prstGeom prst="rect">
@@ -6887,8 +7326,14 @@
           <a:lstStyle/>
           <a:p>
             <a:pPr>
-              <a:spcAft>
-                <a:spcPts val="600"/>
+              <a:lnSpc>
+                <a:spcPct val="104000"/>
+              </a:lnSpc>
+              <a:spcBef>
+                <a:spcPts val="0"/>
+              </a:spcBef>
+              <a:spcAft>
+                <a:spcPts val="0"/>
               </a:spcAft>
               <a:defRPr sz="1200" b="1">
                 <a:solidFill>
@@ -6898,6 +7343,7 @@
               </a:defRPr>
             </a:pPr>
             <a:r>
+              <a:rPr lang="en-CA"/>
               <a:t>Output: findings + open decisions</a:t>
             </a:r>
           </a:p>
@@ -6926,8 +7372,14 @@
           <a:lstStyle/>
           <a:p>
             <a:pPr>
-              <a:spcAft>
-                <a:spcPts val="600"/>
+              <a:lnSpc>
+                <a:spcPct val="104000"/>
+              </a:lnSpc>
+              <a:spcBef>
+                <a:spcPts val="0"/>
+              </a:spcBef>
+              <a:spcAft>
+                <a:spcPts val="0"/>
               </a:spcAft>
               <a:defRPr sz="1200" b="0">
                 <a:solidFill>
@@ -6937,6 +7389,7 @@
               </a:defRPr>
             </a:pPr>
             <a:r>
+              <a:rPr lang="en-CA"/>
               <a:t>/rpi-research</a:t>
             </a:r>
           </a:p>
@@ -7055,8 +7508,14 @@
           <a:lstStyle/>
           <a:p>
             <a:pPr>
-              <a:spcAft>
-                <a:spcPts val="600"/>
+              <a:lnSpc>
+                <a:spcPct val="104000"/>
+              </a:lnSpc>
+              <a:spcBef>
+                <a:spcPts val="0"/>
+              </a:spcBef>
+              <a:spcAft>
+                <a:spcPts val="0"/>
               </a:spcAft>
               <a:defRPr sz="1800" b="1">
                 <a:solidFill>
@@ -7066,6 +7525,7 @@
               </a:defRPr>
             </a:pPr>
             <a:r>
+              <a:rPr lang="en-CA"/>
               <a:t>P</a:t>
             </a:r>
           </a:p>
@@ -7094,8 +7554,14 @@
           <a:lstStyle/>
           <a:p>
             <a:pPr>
-              <a:spcAft>
-                <a:spcPts val="600"/>
+              <a:lnSpc>
+                <a:spcPct val="104000"/>
+              </a:lnSpc>
+              <a:spcBef>
+                <a:spcPts val="0"/>
+              </a:spcBef>
+              <a:spcAft>
+                <a:spcPts val="0"/>
               </a:spcAft>
               <a:defRPr sz="2600" b="1">
                 <a:solidFill>
@@ -7105,6 +7571,7 @@
               </a:defRPr>
             </a:pPr>
             <a:r>
+              <a:rPr lang="en-CA"/>
               <a:t>Plan</a:t>
             </a:r>
           </a:p>
@@ -7133,8 +7600,14 @@
           <a:lstStyle/>
           <a:p>
             <a:pPr>
-              <a:spcAft>
-                <a:spcPts val="600"/>
+              <a:lnSpc>
+                <a:spcPct val="104000"/>
+              </a:lnSpc>
+              <a:spcBef>
+                <a:spcPts val="0"/>
+              </a:spcBef>
+              <a:spcAft>
+                <a:spcPts val="0"/>
               </a:spcAft>
               <a:defRPr sz="1400" b="1">
                 <a:solidFill>
@@ -7144,6 +7617,7 @@
               </a:defRPr>
             </a:pPr>
             <a:r>
+              <a:rPr lang="en-CA"/>
               <a:t>Make success testable</a:t>
             </a:r>
           </a:p>
@@ -7172,10 +7646,16 @@
           <a:lstStyle/>
           <a:p>
             <a:pPr>
-              <a:spcAft>
-                <a:spcPts val="600"/>
-              </a:spcAft>
-              <a:defRPr sz="1700" b="0">
+              <a:lnSpc>
+                <a:spcPct val="104000"/>
+              </a:lnSpc>
+              <a:spcBef>
+                <a:spcPts val="0"/>
+              </a:spcBef>
+              <a:spcAft>
+                <a:spcPts val="0"/>
+              </a:spcAft>
+              <a:defRPr sz="1600" b="0">
                 <a:solidFill>
                   <a:srgbClr val="153A2D"/>
                 </a:solidFill>
@@ -7183,15 +7663,22 @@
               </a:defRPr>
             </a:pPr>
             <a:r>
+              <a:rPr lang="en-CA"/>
               <a:t>Choose the split and metrics.</a:t>
             </a:r>
           </a:p>
           <a:p>
             <a:pPr>
-              <a:spcAft>
-                <a:spcPts val="600"/>
-              </a:spcAft>
-              <a:defRPr sz="1700" b="0">
+              <a:lnSpc>
+                <a:spcPct val="104000"/>
+              </a:lnSpc>
+              <a:spcBef>
+                <a:spcPts val="0"/>
+              </a:spcBef>
+              <a:spcAft>
+                <a:spcPts val="0"/>
+              </a:spcAft>
+              <a:defRPr sz="1600" b="0">
                 <a:solidFill>
                   <a:srgbClr val="153A2D"/>
                 </a:solidFill>
@@ -7199,15 +7686,22 @@
               </a:defRPr>
             </a:pPr>
             <a:r>
+              <a:rPr lang="en-CA"/>
               <a:t>Sequence small, bounded tasks.</a:t>
             </a:r>
           </a:p>
           <a:p>
             <a:pPr>
-              <a:spcAft>
-                <a:spcPts val="600"/>
-              </a:spcAft>
-              <a:defRPr sz="1700" b="0">
+              <a:lnSpc>
+                <a:spcPct val="104000"/>
+              </a:lnSpc>
+              <a:spcBef>
+                <a:spcPts val="0"/>
+              </a:spcBef>
+              <a:spcAft>
+                <a:spcPts val="0"/>
+              </a:spcAft>
+              <a:defRPr sz="1600" b="0">
                 <a:solidFill>
                   <a:srgbClr val="153A2D"/>
                 </a:solidFill>
@@ -7215,6 +7709,7 @@
               </a:defRPr>
             </a:pPr>
             <a:r>
+              <a:rPr lang="en-CA"/>
               <a:t>Define tests and acceptance criteria.</a:t>
             </a:r>
           </a:p>
@@ -7228,7 +7723,7 @@
         </p:nvSpPr>
         <p:spPr>
           <a:xfrm>
-            <a:off x="4572000" y="4892040"/>
+            <a:off x="4572000" y="4956048"/>
             <a:ext cx="3054096" cy="265176"/>
           </a:xfrm>
           <a:prstGeom prst="rect">
@@ -7243,8 +7738,14 @@
           <a:lstStyle/>
           <a:p>
             <a:pPr>
-              <a:spcAft>
-                <a:spcPts val="600"/>
+              <a:lnSpc>
+                <a:spcPct val="104000"/>
+              </a:lnSpc>
+              <a:spcBef>
+                <a:spcPts val="0"/>
+              </a:spcBef>
+              <a:spcAft>
+                <a:spcPts val="0"/>
               </a:spcAft>
               <a:defRPr sz="1200" b="1">
                 <a:solidFill>
@@ -7254,6 +7755,7 @@
               </a:defRPr>
             </a:pPr>
             <a:r>
+              <a:rPr lang="en-CA"/>
               <a:t>Output: plan + critique</a:t>
             </a:r>
           </a:p>
@@ -7282,8 +7784,14 @@
           <a:lstStyle/>
           <a:p>
             <a:pPr>
-              <a:spcAft>
-                <a:spcPts val="600"/>
+              <a:lnSpc>
+                <a:spcPct val="104000"/>
+              </a:lnSpc>
+              <a:spcBef>
+                <a:spcPts val="0"/>
+              </a:spcBef>
+              <a:spcAft>
+                <a:spcPts val="0"/>
               </a:spcAft>
               <a:defRPr sz="1200" b="0">
                 <a:solidFill>
@@ -7293,6 +7801,7 @@
               </a:defRPr>
             </a:pPr>
             <a:r>
+              <a:rPr lang="en-CA"/>
               <a:t>/rpi-plan</a:t>
             </a:r>
           </a:p>
@@ -7411,8 +7920,14 @@
           <a:lstStyle/>
           <a:p>
             <a:pPr>
-              <a:spcAft>
-                <a:spcPts val="600"/>
+              <a:lnSpc>
+                <a:spcPct val="104000"/>
+              </a:lnSpc>
+              <a:spcBef>
+                <a:spcPts val="0"/>
+              </a:spcBef>
+              <a:spcAft>
+                <a:spcPts val="0"/>
               </a:spcAft>
               <a:defRPr sz="1800" b="1">
                 <a:solidFill>
@@ -7422,6 +7937,7 @@
               </a:defRPr>
             </a:pPr>
             <a:r>
+              <a:rPr lang="en-CA"/>
               <a:t>I</a:t>
             </a:r>
           </a:p>
@@ -7450,8 +7966,14 @@
           <a:lstStyle/>
           <a:p>
             <a:pPr>
-              <a:spcAft>
-                <a:spcPts val="600"/>
+              <a:lnSpc>
+                <a:spcPct val="104000"/>
+              </a:lnSpc>
+              <a:spcBef>
+                <a:spcPts val="0"/>
+              </a:spcBef>
+              <a:spcAft>
+                <a:spcPts val="0"/>
               </a:spcAft>
               <a:defRPr sz="2600" b="1">
                 <a:solidFill>
@@ -7461,6 +7983,7 @@
               </a:defRPr>
             </a:pPr>
             <a:r>
+              <a:rPr lang="en-CA"/>
               <a:t>Implement</a:t>
             </a:r>
           </a:p>
@@ -7489,8 +8012,14 @@
           <a:lstStyle/>
           <a:p>
             <a:pPr>
-              <a:spcAft>
-                <a:spcPts val="600"/>
+              <a:lnSpc>
+                <a:spcPct val="104000"/>
+              </a:lnSpc>
+              <a:spcBef>
+                <a:spcPts val="0"/>
+              </a:spcBef>
+              <a:spcAft>
+                <a:spcPts val="0"/>
               </a:spcAft>
               <a:defRPr sz="1400" b="1">
                 <a:solidFill>
@@ -7500,6 +8029,7 @@
               </a:defRPr>
             </a:pPr>
             <a:r>
+              <a:rPr lang="en-CA"/>
               <a:t>Execute the approved scope</a:t>
             </a:r>
           </a:p>
@@ -7528,10 +8058,16 @@
           <a:lstStyle/>
           <a:p>
             <a:pPr>
-              <a:spcAft>
-                <a:spcPts val="600"/>
-              </a:spcAft>
-              <a:defRPr sz="1700" b="0">
+              <a:lnSpc>
+                <a:spcPct val="104000"/>
+              </a:lnSpc>
+              <a:spcBef>
+                <a:spcPts val="0"/>
+              </a:spcBef>
+              <a:spcAft>
+                <a:spcPts val="0"/>
+              </a:spcAft>
+              <a:defRPr sz="1600" b="0">
                 <a:solidFill>
                   <a:srgbClr val="153A2D"/>
                 </a:solidFill>
@@ -7539,15 +8075,22 @@
               </a:defRPr>
             </a:pPr>
             <a:r>
+              <a:rPr lang="en-CA"/>
               <a:t>Build the pipeline and tests.</a:t>
             </a:r>
           </a:p>
           <a:p>
             <a:pPr>
-              <a:spcAft>
-                <a:spcPts val="600"/>
-              </a:spcAft>
-              <a:defRPr sz="1700" b="0">
+              <a:lnSpc>
+                <a:spcPct val="104000"/>
+              </a:lnSpc>
+              <a:spcBef>
+                <a:spcPts val="0"/>
+              </a:spcBef>
+              <a:spcAft>
+                <a:spcPts val="0"/>
+              </a:spcAft>
+              <a:defRPr sz="1600" b="0">
                 <a:solidFill>
                   <a:srgbClr val="153A2D"/>
                 </a:solidFill>
@@ -7555,15 +8098,22 @@
               </a:defRPr>
             </a:pPr>
             <a:r>
+              <a:rPr lang="en-CA"/>
               <a:t>Run checks; record real results.</a:t>
             </a:r>
           </a:p>
           <a:p>
             <a:pPr>
-              <a:spcAft>
-                <a:spcPts val="600"/>
-              </a:spcAft>
-              <a:defRPr sz="1700" b="0">
+              <a:lnSpc>
+                <a:spcPct val="104000"/>
+              </a:lnSpc>
+              <a:spcBef>
+                <a:spcPts val="0"/>
+              </a:spcBef>
+              <a:spcAft>
+                <a:spcPts val="0"/>
+              </a:spcAft>
+              <a:defRPr sz="1600" b="0">
                 <a:solidFill>
                   <a:srgbClr val="153A2D"/>
                 </a:solidFill>
@@ -7571,6 +8121,7 @@
               </a:defRPr>
             </a:pPr>
             <a:r>
+              <a:rPr lang="en-CA"/>
               <a:t>Review diffs against the plan.</a:t>
             </a:r>
           </a:p>
@@ -7584,7 +8135,7 @@
         </p:nvSpPr>
         <p:spPr>
           <a:xfrm>
-            <a:off x="8385048" y="4892040"/>
+            <a:off x="8385048" y="4956048"/>
             <a:ext cx="3054096" cy="265176"/>
           </a:xfrm>
           <a:prstGeom prst="rect">
@@ -7599,8 +8150,14 @@
           <a:lstStyle/>
           <a:p>
             <a:pPr>
-              <a:spcAft>
-                <a:spcPts val="600"/>
+              <a:lnSpc>
+                <a:spcPct val="104000"/>
+              </a:lnSpc>
+              <a:spcBef>
+                <a:spcPts val="0"/>
+              </a:spcBef>
+              <a:spcAft>
+                <a:spcPts val="0"/>
               </a:spcAft>
               <a:defRPr sz="1200" b="1">
                 <a:solidFill>
@@ -7610,6 +8167,7 @@
               </a:defRPr>
             </a:pPr>
             <a:r>
+              <a:rPr lang="en-CA"/>
               <a:t>Output: changes + validation</a:t>
             </a:r>
           </a:p>
@@ -7638,8 +8196,14 @@
           <a:lstStyle/>
           <a:p>
             <a:pPr>
-              <a:spcAft>
-                <a:spcPts val="600"/>
+              <a:lnSpc>
+                <a:spcPct val="104000"/>
+              </a:lnSpc>
+              <a:spcBef>
+                <a:spcPts val="0"/>
+              </a:spcBef>
+              <a:spcAft>
+                <a:spcPts val="0"/>
               </a:spcAft>
               <a:defRPr sz="1200" b="0">
                 <a:solidFill>
@@ -7649,6 +8213,7 @@
               </a:defRPr>
             </a:pPr>
             <a:r>
+              <a:rPr lang="en-CA"/>
               <a:t>/rpi-implement</a:t>
             </a:r>
           </a:p>
@@ -7722,8 +8287,14 @@
           <a:lstStyle/>
           <a:p>
             <a:pPr>
-              <a:spcAft>
-                <a:spcPts val="600"/>
+              <a:lnSpc>
+                <a:spcPct val="104000"/>
+              </a:lnSpc>
+              <a:spcBef>
+                <a:spcPts val="0"/>
+              </a:spcBef>
+              <a:spcAft>
+                <a:spcPts val="0"/>
               </a:spcAft>
               <a:defRPr sz="1300" b="0">
                 <a:solidFill>
@@ -7733,6 +8304,7 @@
               </a:defRPr>
             </a:pPr>
             <a:r>
+              <a:rPr lang="en-CA"/>
               <a:t>Reuse adequate research  |  Review the plan  |  Validate results  |  Route gaps back to the right phase</a:t>
             </a:r>
           </a:p>
@@ -7830,8 +8402,14 @@
           <a:lstStyle/>
           <a:p>
             <a:pPr>
-              <a:spcAft>
-                <a:spcPts val="600"/>
+              <a:lnSpc>
+                <a:spcPct val="104000"/>
+              </a:lnSpc>
+              <a:spcBef>
+                <a:spcPts val="0"/>
+              </a:spcBef>
+              <a:spcAft>
+                <a:spcPts val="0"/>
               </a:spcAft>
               <a:defRPr sz="1100" b="1">
                 <a:solidFill>
@@ -7841,6 +8419,7 @@
               </a:defRPr>
             </a:pPr>
             <a:r>
+              <a:rPr lang="en-CA"/>
               <a:t>GITHUB COPILOT  /  VS CODE</a:t>
             </a:r>
           </a:p>
@@ -7869,8 +8448,14 @@
           <a:lstStyle/>
           <a:p>
             <a:pPr>
-              <a:spcAft>
-                <a:spcPts val="600"/>
+              <a:lnSpc>
+                <a:spcPct val="104000"/>
+              </a:lnSpc>
+              <a:spcBef>
+                <a:spcPts val="0"/>
+              </a:spcBef>
+              <a:spcAft>
+                <a:spcPts val="0"/>
               </a:spcAft>
               <a:defRPr sz="3100" b="1">
                 <a:solidFill>
@@ -7880,6 +8465,7 @@
               </a:defRPr>
             </a:pPr>
             <a:r>
+              <a:rPr lang="en-CA"/>
               <a:t>Right-size the model to the uncertainty</a:t>
             </a:r>
           </a:p>
@@ -7908,8 +8494,14 @@
           <a:lstStyle/>
           <a:p>
             <a:pPr>
-              <a:spcAft>
-                <a:spcPts val="600"/>
+              <a:lnSpc>
+                <a:spcPct val="104000"/>
+              </a:lnSpc>
+              <a:spcBef>
+                <a:spcPts val="0"/>
+              </a:spcBef>
+              <a:spcAft>
+                <a:spcPts val="0"/>
               </a:spcAft>
               <a:defRPr sz="1700" b="0">
                 <a:solidFill>
@@ -7919,6 +8511,7 @@
               </a:defRPr>
             </a:pPr>
             <a:r>
+              <a:rPr lang="en-CA"/>
               <a:t>Start with routing, or choose capability manually. Escalate when evidence says you should.</a:t>
             </a:r>
           </a:p>
@@ -7947,8 +8540,14 @@
           <a:lstStyle/>
           <a:p>
             <a:pPr>
-              <a:spcAft>
-                <a:spcPts val="600"/>
+              <a:lnSpc>
+                <a:spcPct val="104000"/>
+              </a:lnSpc>
+              <a:spcBef>
+                <a:spcPts val="0"/>
+              </a:spcBef>
+              <a:spcAft>
+                <a:spcPts val="0"/>
               </a:spcAft>
               <a:defRPr sz="800" b="0">
                 <a:solidFill>
@@ -7958,6 +8557,7 @@
               </a:defRPr>
             </a:pPr>
             <a:r>
+              <a:rPr lang="en-CA"/>
               <a:t>DESJARDINS-INSPIRED  /  GITHUB COPILOT FOR DATA SCIENCE</a:t>
             </a:r>
           </a:p>
@@ -7986,8 +8586,14 @@
           <a:lstStyle/>
           <a:p>
             <a:pPr>
-              <a:spcAft>
-                <a:spcPts val="600"/>
+              <a:lnSpc>
+                <a:spcPct val="104000"/>
+              </a:lnSpc>
+              <a:spcBef>
+                <a:spcPts val="0"/>
+              </a:spcBef>
+              <a:spcAft>
+                <a:spcPts val="0"/>
               </a:spcAft>
               <a:defRPr sz="900" b="0">
                 <a:solidFill>
@@ -7997,7 +8603,7 @@
               </a:defRPr>
             </a:pPr>
             <a:r>
-              <a:rPr>
+              <a:rPr lang="en-CA">
                 <a:hlinkClick r:id="rId2"/>
               </a:rPr>
               <a:t>Source / reference</a:t>
@@ -8028,8 +8634,14 @@
           <a:lstStyle/>
           <a:p>
             <a:pPr>
-              <a:spcAft>
-                <a:spcPts val="600"/>
+              <a:lnSpc>
+                <a:spcPct val="104000"/>
+              </a:lnSpc>
+              <a:spcBef>
+                <a:spcPts val="0"/>
+              </a:spcBef>
+              <a:spcAft>
+                <a:spcPts val="0"/>
               </a:spcAft>
               <a:defRPr sz="900" b="1">
                 <a:solidFill>
@@ -8039,6 +8651,7 @@
               </a:defRPr>
             </a:pPr>
             <a:r>
+              <a:rPr lang="en-CA"/>
               <a:t>04 / 05</a:t>
             </a:r>
           </a:p>
@@ -8112,8 +8725,14 @@
           <a:lstStyle/>
           <a:p>
             <a:pPr>
-              <a:spcAft>
-                <a:spcPts val="600"/>
+              <a:lnSpc>
+                <a:spcPct val="104000"/>
+              </a:lnSpc>
+              <a:spcBef>
+                <a:spcPts val="0"/>
+              </a:spcBef>
+              <a:spcAft>
+                <a:spcPts val="0"/>
               </a:spcAft>
               <a:defRPr sz="1100" b="1">
                 <a:solidFill>
@@ -8123,6 +8742,7 @@
               </a:defRPr>
             </a:pPr>
             <a:r>
+              <a:rPr lang="en-CA"/>
               <a:t>AUTOMATIC ROUTING</a:t>
             </a:r>
           </a:p>
@@ -8151,8 +8771,14 @@
           <a:lstStyle/>
           <a:p>
             <a:pPr>
-              <a:spcAft>
-                <a:spcPts val="600"/>
+              <a:lnSpc>
+                <a:spcPct val="104000"/>
+              </a:lnSpc>
+              <a:spcBef>
+                <a:spcPts val="0"/>
+              </a:spcBef>
+              <a:spcAft>
+                <a:spcPts val="0"/>
               </a:spcAft>
               <a:defRPr sz="2500" b="1">
                 <a:solidFill>
@@ -8162,6 +8788,7 @@
               </a:defRPr>
             </a:pPr>
             <a:r>
+              <a:rPr lang="en-CA"/>
               <a:t>Auto / Hydrafusion*</a:t>
             </a:r>
           </a:p>
@@ -8190,8 +8817,14 @@
           <a:lstStyle/>
           <a:p>
             <a:pPr>
-              <a:spcAft>
-                <a:spcPts val="600"/>
+              <a:lnSpc>
+                <a:spcPct val="104000"/>
+              </a:lnSpc>
+              <a:spcBef>
+                <a:spcPts val="0"/>
+              </a:spcBef>
+              <a:spcAft>
+                <a:spcPts val="0"/>
               </a:spcAft>
               <a:defRPr sz="2000" b="0">
                 <a:solidFill>
@@ -8201,13 +8834,20 @@
               </a:defRPr>
             </a:pPr>
             <a:r>
+              <a:rPr lang="en-CA"/>
               <a:t>Let the available router balance</a:t>
             </a:r>
           </a:p>
           <a:p>
             <a:pPr>
-              <a:spcAft>
-                <a:spcPts val="600"/>
+              <a:lnSpc>
+                <a:spcPct val="104000"/>
+              </a:lnSpc>
+              <a:spcBef>
+                <a:spcPts val="0"/>
+              </a:spcBef>
+              <a:spcAft>
+                <a:spcPts val="0"/>
               </a:spcAft>
               <a:defRPr sz="2000" b="0">
                 <a:solidFill>
@@ -8217,6 +8857,7 @@
               </a:defRPr>
             </a:pPr>
             <a:r>
+              <a:rPr lang="en-CA"/>
               <a:t>capability, latency and cost.</a:t>
             </a:r>
           </a:p>
@@ -8245,8 +8886,14 @@
           <a:lstStyle/>
           <a:p>
             <a:pPr>
-              <a:spcAft>
-                <a:spcPts val="600"/>
+              <a:lnSpc>
+                <a:spcPct val="104000"/>
+              </a:lnSpc>
+              <a:spcBef>
+                <a:spcPts val="0"/>
+              </a:spcBef>
+              <a:spcAft>
+                <a:spcPts val="0"/>
               </a:spcAft>
               <a:defRPr sz="1400" b="0">
                 <a:solidFill>
@@ -8256,13 +8903,20 @@
               </a:defRPr>
             </a:pPr>
             <a:r>
+              <a:rPr lang="en-CA"/>
               <a:t>Use approved options only.</a:t>
             </a:r>
           </a:p>
           <a:p>
             <a:pPr>
-              <a:spcAft>
-                <a:spcPts val="600"/>
+              <a:lnSpc>
+                <a:spcPct val="104000"/>
+              </a:lnSpc>
+              <a:spcBef>
+                <a:spcPts val="0"/>
+              </a:spcBef>
+              <a:spcAft>
+                <a:spcPts val="0"/>
               </a:spcAft>
               <a:defRPr sz="1400" b="0">
                 <a:solidFill>
@@ -8272,6 +8926,7 @@
               </a:defRPr>
             </a:pPr>
             <a:r>
+              <a:rPr lang="en-CA"/>
               <a:t>Check the picker and admin policy.</a:t>
             </a:r>
           </a:p>
@@ -8300,8 +8955,14 @@
           <a:lstStyle/>
           <a:p>
             <a:pPr>
-              <a:spcAft>
-                <a:spcPts val="600"/>
+              <a:lnSpc>
+                <a:spcPct val="104000"/>
+              </a:lnSpc>
+              <a:spcBef>
+                <a:spcPts val="0"/>
+              </a:spcBef>
+              <a:spcAft>
+                <a:spcPts val="0"/>
               </a:spcAft>
               <a:defRPr sz="1100" b="1">
                 <a:solidFill>
@@ -8311,6 +8972,7 @@
               </a:defRPr>
             </a:pPr>
             <a:r>
+              <a:rPr lang="en-CA"/>
               <a:t>MANUAL CAPABILITY CHOICE</a:t>
             </a:r>
           </a:p>
@@ -8386,8 +9048,14 @@
           <a:lstStyle/>
           <a:p>
             <a:pPr>
-              <a:spcAft>
-                <a:spcPts val="600"/>
+              <a:lnSpc>
+                <a:spcPct val="104000"/>
+              </a:lnSpc>
+              <a:spcBef>
+                <a:spcPts val="0"/>
+              </a:spcBef>
+              <a:spcAft>
+                <a:spcPts val="0"/>
               </a:spcAft>
               <a:defRPr sz="1200" b="1">
                 <a:solidFill>
@@ -8397,6 +9065,7 @@
               </a:defRPr>
             </a:pPr>
             <a:r>
+              <a:rPr lang="en-CA"/>
               <a:t>LARGE</a:t>
             </a:r>
           </a:p>
@@ -8425,8 +9094,14 @@
           <a:lstStyle/>
           <a:p>
             <a:pPr>
-              <a:spcAft>
-                <a:spcPts val="600"/>
+              <a:lnSpc>
+                <a:spcPct val="104000"/>
+              </a:lnSpc>
+              <a:spcBef>
+                <a:spcPts val="0"/>
+              </a:spcBef>
+              <a:spcAft>
+                <a:spcPts val="0"/>
               </a:spcAft>
               <a:defRPr sz="1800" b="1">
                 <a:solidFill>
@@ -8436,6 +9111,7 @@
               </a:defRPr>
             </a:pPr>
             <a:r>
+              <a:rPr lang="en-CA"/>
               <a:t>Research + rubber ducking</a:t>
             </a:r>
           </a:p>
@@ -8464,8 +9140,14 @@
           <a:lstStyle/>
           <a:p>
             <a:pPr>
-              <a:spcAft>
-                <a:spcPts val="600"/>
+              <a:lnSpc>
+                <a:spcPct val="104000"/>
+              </a:lnSpc>
+              <a:spcBef>
+                <a:spcPts val="0"/>
+              </a:spcBef>
+              <a:spcAft>
+                <a:spcPts val="0"/>
               </a:spcAft>
               <a:defRPr sz="1200" b="0">
                 <a:solidFill>
@@ -8475,13 +9157,20 @@
               </a:defRPr>
             </a:pPr>
             <a:r>
+              <a:rPr lang="en-CA"/>
               <a:t>Challenge assumptions, compare approaches,</a:t>
             </a:r>
           </a:p>
           <a:p>
             <a:pPr>
-              <a:spcAft>
-                <a:spcPts val="600"/>
+              <a:lnSpc>
+                <a:spcPct val="104000"/>
+              </a:lnSpc>
+              <a:spcBef>
+                <a:spcPts val="0"/>
+              </a:spcBef>
+              <a:spcAft>
+                <a:spcPts val="0"/>
               </a:spcAft>
               <a:defRPr sz="1200" b="0">
                 <a:solidFill>
@@ -8491,6 +9180,7 @@
               </a:defRPr>
             </a:pPr>
             <a:r>
+              <a:rPr lang="en-CA"/>
               <a:t>look for leakage and counterexamples.</a:t>
             </a:r>
           </a:p>
@@ -8566,8 +9256,14 @@
           <a:lstStyle/>
           <a:p>
             <a:pPr>
-              <a:spcAft>
-                <a:spcPts val="600"/>
+              <a:lnSpc>
+                <a:spcPct val="104000"/>
+              </a:lnSpc>
+              <a:spcBef>
+                <a:spcPts val="0"/>
+              </a:spcBef>
+              <a:spcAft>
+                <a:spcPts val="0"/>
               </a:spcAft>
               <a:defRPr sz="1200" b="1">
                 <a:solidFill>
@@ -8577,6 +9273,7 @@
               </a:defRPr>
             </a:pPr>
             <a:r>
+              <a:rPr lang="en-CA"/>
               <a:t>MEDIUM</a:t>
             </a:r>
           </a:p>
@@ -8605,8 +9302,14 @@
           <a:lstStyle/>
           <a:p>
             <a:pPr>
-              <a:spcAft>
-                <a:spcPts val="600"/>
+              <a:lnSpc>
+                <a:spcPct val="104000"/>
+              </a:lnSpc>
+              <a:spcBef>
+                <a:spcPts val="0"/>
+              </a:spcBef>
+              <a:spcAft>
+                <a:spcPts val="0"/>
               </a:spcAft>
               <a:defRPr sz="1800" b="1">
                 <a:solidFill>
@@ -8616,6 +9319,7 @@
               </a:defRPr>
             </a:pPr>
             <a:r>
+              <a:rPr lang="en-CA"/>
               <a:t>Planning</a:t>
             </a:r>
           </a:p>
@@ -8644,8 +9348,14 @@
           <a:lstStyle/>
           <a:p>
             <a:pPr>
-              <a:spcAft>
-                <a:spcPts val="600"/>
+              <a:lnSpc>
+                <a:spcPct val="104000"/>
+              </a:lnSpc>
+              <a:spcBef>
+                <a:spcPts val="0"/>
+              </a:spcBef>
+              <a:spcAft>
+                <a:spcPts val="0"/>
               </a:spcAft>
               <a:defRPr sz="1200" b="0">
                 <a:solidFill>
@@ -8655,13 +9365,20 @@
               </a:defRPr>
             </a:pPr>
             <a:r>
+              <a:rPr lang="en-CA"/>
               <a:t>Turn evidence into tasks, dependencies</a:t>
             </a:r>
           </a:p>
           <a:p>
             <a:pPr>
-              <a:spcAft>
-                <a:spcPts val="600"/>
+              <a:lnSpc>
+                <a:spcPct val="104000"/>
+              </a:lnSpc>
+              <a:spcBef>
+                <a:spcPts val="0"/>
+              </a:spcBef>
+              <a:spcAft>
+                <a:spcPts val="0"/>
               </a:spcAft>
               <a:defRPr sz="1200" b="0">
                 <a:solidFill>
@@ -8671,6 +9388,7 @@
               </a:defRPr>
             </a:pPr>
             <a:r>
+              <a:rPr lang="en-CA"/>
               <a:t>and measurable acceptance criteria.</a:t>
             </a:r>
           </a:p>
@@ -8746,8 +9464,14 @@
           <a:lstStyle/>
           <a:p>
             <a:pPr>
-              <a:spcAft>
-                <a:spcPts val="600"/>
+              <a:lnSpc>
+                <a:spcPct val="104000"/>
+              </a:lnSpc>
+              <a:spcBef>
+                <a:spcPts val="0"/>
+              </a:spcBef>
+              <a:spcAft>
+                <a:spcPts val="0"/>
               </a:spcAft>
               <a:defRPr sz="1200" b="1">
                 <a:solidFill>
@@ -8757,6 +9481,7 @@
               </a:defRPr>
             </a:pPr>
             <a:r>
+              <a:rPr lang="en-CA"/>
               <a:t>SMALL / MEDIUM</a:t>
             </a:r>
           </a:p>
@@ -8785,8 +9510,14 @@
           <a:lstStyle/>
           <a:p>
             <a:pPr>
-              <a:spcAft>
-                <a:spcPts val="600"/>
+              <a:lnSpc>
+                <a:spcPct val="104000"/>
+              </a:lnSpc>
+              <a:spcBef>
+                <a:spcPts val="0"/>
+              </a:spcBef>
+              <a:spcAft>
+                <a:spcPts val="0"/>
               </a:spcAft>
               <a:defRPr sz="1800" b="1">
                 <a:solidFill>
@@ -8796,6 +9527,7 @@
               </a:defRPr>
             </a:pPr>
             <a:r>
+              <a:rPr lang="en-CA"/>
               <a:t>Implementation</a:t>
             </a:r>
           </a:p>
@@ -8824,8 +9556,14 @@
           <a:lstStyle/>
           <a:p>
             <a:pPr>
-              <a:spcAft>
-                <a:spcPts val="600"/>
+              <a:lnSpc>
+                <a:spcPct val="104000"/>
+              </a:lnSpc>
+              <a:spcBef>
+                <a:spcPts val="0"/>
+              </a:spcBef>
+              <a:spcAft>
+                <a:spcPts val="0"/>
               </a:spcAft>
               <a:defRPr sz="1200" b="0">
                 <a:solidFill>
@@ -8835,13 +9573,20 @@
               </a:defRPr>
             </a:pPr>
             <a:r>
+              <a:rPr lang="en-CA"/>
               <a:t>Small for routine edits; medium for complex changes.</a:t>
             </a:r>
           </a:p>
           <a:p>
             <a:pPr>
-              <a:spcAft>
-                <a:spcPts val="600"/>
+              <a:lnSpc>
+                <a:spcPct val="104000"/>
+              </a:lnSpc>
+              <a:spcBef>
+                <a:spcPts val="0"/>
+              </a:spcBef>
+              <a:spcAft>
+                <a:spcPts val="0"/>
               </a:spcAft>
               <a:defRPr sz="1200" b="0">
                 <a:solidFill>
@@ -8851,6 +9596,7 @@
               </a:defRPr>
             </a:pPr>
             <a:r>
+              <a:rPr lang="en-CA"/>
               <a:t>Escalate if failures or ambiguity persist.</a:t>
             </a:r>
           </a:p>
@@ -8879,8 +9625,14 @@
           <a:lstStyle/>
           <a:p>
             <a:pPr>
-              <a:spcAft>
-                <a:spcPts val="600"/>
+              <a:lnSpc>
+                <a:spcPct val="104000"/>
+              </a:lnSpc>
+              <a:spcBef>
+                <a:spcPts val="0"/>
+              </a:spcBef>
+              <a:spcAft>
+                <a:spcPts val="0"/>
               </a:spcAft>
               <a:defRPr sz="1100" b="0">
                 <a:solidFill>
@@ -8890,6 +9642,7 @@
               </a:defRPr>
             </a:pPr>
             <a:r>
+              <a:rPr lang="en-CA"/>
               <a:t>*Hydrafusion is setup-dependent, not a universal Copilot option. Tiers above are a practical heuristic, not product labels.</a:t>
             </a:r>
           </a:p>
@@ -8987,8 +9740,14 @@
           <a:lstStyle/>
           <a:p>
             <a:pPr>
-              <a:spcAft>
-                <a:spcPts val="600"/>
+              <a:lnSpc>
+                <a:spcPct val="104000"/>
+              </a:lnSpc>
+              <a:spcBef>
+                <a:spcPts val="0"/>
+              </a:spcBef>
+              <a:spcAft>
+                <a:spcPts val="0"/>
               </a:spcAft>
               <a:defRPr sz="1100" b="1">
                 <a:solidFill>
@@ -8998,6 +9757,7 @@
               </a:defRPr>
             </a:pPr>
             <a:r>
+              <a:rPr lang="en-CA"/>
               <a:t>GITHUB COPILOT  /  VS CODE</a:t>
             </a:r>
           </a:p>
@@ -9026,8 +9786,14 @@
           <a:lstStyle/>
           <a:p>
             <a:pPr>
-              <a:spcAft>
-                <a:spcPts val="600"/>
+              <a:lnSpc>
+                <a:spcPct val="104000"/>
+              </a:lnSpc>
+              <a:spcBef>
+                <a:spcPts val="0"/>
+              </a:spcBef>
+              <a:spcAft>
+                <a:spcPts val="0"/>
               </a:spcAft>
               <a:defRPr sz="3100" b="1">
                 <a:solidFill>
@@ -9037,6 +9803,7 @@
               </a:defRPr>
             </a:pPr>
             <a:r>
+              <a:rPr lang="en-CA"/>
               <a:t>Try it: a reproducible credit-risk baseline</a:t>
             </a:r>
           </a:p>
@@ -9065,8 +9832,14 @@
           <a:lstStyle/>
           <a:p>
             <a:pPr>
-              <a:spcAft>
-                <a:spcPts val="600"/>
+              <a:lnSpc>
+                <a:spcPct val="104000"/>
+              </a:lnSpc>
+              <a:spcBef>
+                <a:spcPts val="0"/>
+              </a:spcBef>
+              <a:spcAft>
+                <a:spcPts val="0"/>
               </a:spcAft>
               <a:defRPr sz="1700" b="0">
                 <a:solidFill>
@@ -9076,6 +9849,7 @@
               </a:defRPr>
             </a:pPr>
             <a:r>
+              <a:rPr lang="en-CA"/>
               <a:t>One synthetic dataset. One clear objective. Three bounded prompts.</a:t>
             </a:r>
           </a:p>
@@ -9104,8 +9878,14 @@
           <a:lstStyle/>
           <a:p>
             <a:pPr>
-              <a:spcAft>
-                <a:spcPts val="600"/>
+              <a:lnSpc>
+                <a:spcPct val="104000"/>
+              </a:lnSpc>
+              <a:spcBef>
+                <a:spcPts val="0"/>
+              </a:spcBef>
+              <a:spcAft>
+                <a:spcPts val="0"/>
               </a:spcAft>
               <a:defRPr sz="800" b="0">
                 <a:solidFill>
@@ -9115,6 +9895,7 @@
               </a:defRPr>
             </a:pPr>
             <a:r>
+              <a:rPr lang="en-CA"/>
               <a:t>DESJARDINS-INSPIRED  /  GITHUB COPILOT FOR DATA SCIENCE</a:t>
             </a:r>
           </a:p>
@@ -9143,8 +9924,14 @@
           <a:lstStyle/>
           <a:p>
             <a:pPr>
-              <a:spcAft>
-                <a:spcPts val="600"/>
+              <a:lnSpc>
+                <a:spcPct val="104000"/>
+              </a:lnSpc>
+              <a:spcBef>
+                <a:spcPts val="0"/>
+              </a:spcBef>
+              <a:spcAft>
+                <a:spcPts val="0"/>
               </a:spcAft>
               <a:defRPr sz="900" b="0">
                 <a:solidFill>
@@ -9154,7 +9941,7 @@
               </a:defRPr>
             </a:pPr>
             <a:r>
-              <a:rPr>
+              <a:rPr lang="en-CA">
                 <a:hlinkClick r:id="rId2"/>
               </a:rPr>
               <a:t>Source / reference</a:t>
@@ -9185,8 +9972,14 @@
           <a:lstStyle/>
           <a:p>
             <a:pPr>
-              <a:spcAft>
-                <a:spcPts val="600"/>
+              <a:lnSpc>
+                <a:spcPct val="104000"/>
+              </a:lnSpc>
+              <a:spcBef>
+                <a:spcPts val="0"/>
+              </a:spcBef>
+              <a:spcAft>
+                <a:spcPts val="0"/>
               </a:spcAft>
               <a:defRPr sz="900" b="1">
                 <a:solidFill>
@@ -9196,6 +9989,7 @@
               </a:defRPr>
             </a:pPr>
             <a:r>
+              <a:rPr lang="en-CA"/>
               <a:t>05 / 05</a:t>
             </a:r>
           </a:p>
@@ -9210,7 +10004,7 @@
         <p:spPr>
           <a:xfrm>
             <a:off x="548640" y="2258568"/>
-            <a:ext cx="7333488" cy="923544"/>
+            <a:ext cx="7333488" cy="1042415"/>
           </a:xfrm>
           <a:prstGeom prst="roundRect">
             <a:avLst>
@@ -9316,8 +10110,14 @@
           <a:lstStyle/>
           <a:p>
             <a:pPr>
-              <a:spcAft>
-                <a:spcPts val="600"/>
+              <a:lnSpc>
+                <a:spcPct val="104000"/>
+              </a:lnSpc>
+              <a:spcBef>
+                <a:spcPts val="0"/>
+              </a:spcBef>
+              <a:spcAft>
+                <a:spcPts val="0"/>
               </a:spcAft>
               <a:defRPr sz="1300" b="1">
                 <a:solidFill>
@@ -9327,6 +10127,7 @@
               </a:defRPr>
             </a:pPr>
             <a:r>
+              <a:rPr lang="en-CA"/>
               <a:t>01</a:t>
             </a:r>
           </a:p>
@@ -9355,8 +10156,14 @@
           <a:lstStyle/>
           <a:p>
             <a:pPr>
-              <a:spcAft>
-                <a:spcPts val="600"/>
+              <a:lnSpc>
+                <a:spcPct val="104000"/>
+              </a:lnSpc>
+              <a:spcBef>
+                <a:spcPts val="0"/>
+              </a:spcBef>
+              <a:spcAft>
+                <a:spcPts val="0"/>
               </a:spcAft>
               <a:defRPr sz="1100" b="1">
                 <a:solidFill>
@@ -9366,6 +10173,7 @@
               </a:defRPr>
             </a:pPr>
             <a:r>
+              <a:rPr lang="en-CA"/>
               <a:t>RESEARCH / ASK</a:t>
             </a:r>
           </a:p>
@@ -9379,8 +10187,8 @@
         </p:nvSpPr>
         <p:spPr>
           <a:xfrm>
-            <a:off x="1408176" y="2624328"/>
-            <a:ext cx="6190488" cy="512064"/>
+            <a:off x="1408176" y="2633472"/>
+            <a:ext cx="6190488" cy="640080"/>
           </a:xfrm>
           <a:prstGeom prst="rect">
             <a:avLst/>
@@ -9394,8 +10202,14 @@
           <a:lstStyle/>
           <a:p>
             <a:pPr>
-              <a:spcAft>
-                <a:spcPts val="600"/>
+              <a:lnSpc>
+                <a:spcPct val="104000"/>
+              </a:lnSpc>
+              <a:spcBef>
+                <a:spcPts val="0"/>
+              </a:spcBef>
+              <a:spcAft>
+                <a:spcPts val="0"/>
               </a:spcAft>
               <a:defRPr sz="1300" b="0">
                 <a:solidFill>
@@ -9405,13 +10219,20 @@
               </a:defRPr>
             </a:pPr>
             <a:r>
+              <a:rPr lang="en-CA"/>
               <a:t>"Inspect this synthetic dataset and notebook.</a:t>
             </a:r>
           </a:p>
           <a:p>
             <a:pPr>
-              <a:spcAft>
-                <a:spcPts val="600"/>
+              <a:lnSpc>
+                <a:spcPct val="104000"/>
+              </a:lnSpc>
+              <a:spcBef>
+                <a:spcPts val="0"/>
+              </a:spcBef>
+              <a:spcAft>
+                <a:spcPts val="0"/>
               </a:spcAft>
               <a:defRPr sz="1300" b="0">
                 <a:solidFill>
@@ -9421,13 +10242,20 @@
               </a:defRPr>
             </a:pPr>
             <a:r>
+              <a:rPr lang="en-CA"/>
               <a:t>Identify leakage risks and compare validation splits.</a:t>
             </a:r>
           </a:p>
           <a:p>
             <a:pPr>
-              <a:spcAft>
-                <a:spcPts val="600"/>
+              <a:lnSpc>
+                <a:spcPct val="104000"/>
+              </a:lnSpc>
+              <a:spcBef>
+                <a:spcPts val="0"/>
+              </a:spcBef>
+              <a:spcAft>
+                <a:spcPts val="0"/>
               </a:spcAft>
               <a:defRPr sz="1300" b="0">
                 <a:solidFill>
@@ -9437,6 +10265,7 @@
               </a:defRPr>
             </a:pPr>
             <a:r>
+              <a:rPr lang="en-CA"/>
               <a:t>Do not edit files yet."</a:t>
             </a:r>
           </a:p>
@@ -9450,8 +10279,8 @@
         </p:nvSpPr>
         <p:spPr>
           <a:xfrm>
-            <a:off x="548640" y="3319272"/>
-            <a:ext cx="7333488" cy="923544"/>
+            <a:off x="548640" y="3374136"/>
+            <a:ext cx="7333488" cy="1042415"/>
           </a:xfrm>
           <a:prstGeom prst="roundRect">
             <a:avLst>
@@ -9497,7 +10326,7 @@
         </p:nvSpPr>
         <p:spPr>
           <a:xfrm>
-            <a:off x="740664" y="3502152"/>
+            <a:off x="740664" y="3557016"/>
             <a:ext cx="484632" cy="484632"/>
           </a:xfrm>
           <a:prstGeom prst="roundRect">
@@ -9542,7 +10371,7 @@
         </p:nvSpPr>
         <p:spPr>
           <a:xfrm>
-            <a:off x="813816" y="3611879"/>
+            <a:off x="813816" y="3666744"/>
             <a:ext cx="365760" cy="219456"/>
           </a:xfrm>
           <a:prstGeom prst="rect">
@@ -9557,8 +10386,14 @@
           <a:lstStyle/>
           <a:p>
             <a:pPr>
-              <a:spcAft>
-                <a:spcPts val="600"/>
+              <a:lnSpc>
+                <a:spcPct val="104000"/>
+              </a:lnSpc>
+              <a:spcBef>
+                <a:spcPts val="0"/>
+              </a:spcBef>
+              <a:spcAft>
+                <a:spcPts val="0"/>
               </a:spcAft>
               <a:defRPr sz="1300" b="1">
                 <a:solidFill>
@@ -9568,6 +10403,7 @@
               </a:defRPr>
             </a:pPr>
             <a:r>
+              <a:rPr lang="en-CA"/>
               <a:t>02</a:t>
             </a:r>
           </a:p>
@@ -9581,7 +10417,7 @@
         </p:nvSpPr>
         <p:spPr>
           <a:xfrm>
-            <a:off x="1408176" y="3419856"/>
+            <a:off x="1408176" y="3474720"/>
             <a:ext cx="6126480" cy="256032"/>
           </a:xfrm>
           <a:prstGeom prst="rect">
@@ -9596,8 +10432,14 @@
           <a:lstStyle/>
           <a:p>
             <a:pPr>
-              <a:spcAft>
-                <a:spcPts val="600"/>
+              <a:lnSpc>
+                <a:spcPct val="104000"/>
+              </a:lnSpc>
+              <a:spcBef>
+                <a:spcPts val="0"/>
+              </a:spcBef>
+              <a:spcAft>
+                <a:spcPts val="0"/>
               </a:spcAft>
               <a:defRPr sz="1100" b="1">
                 <a:solidFill>
@@ -9607,6 +10449,7 @@
               </a:defRPr>
             </a:pPr>
             <a:r>
+              <a:rPr lang="en-CA"/>
               <a:t>PLAN / HVE RPI</a:t>
             </a:r>
           </a:p>
@@ -9620,8 +10463,8 @@
         </p:nvSpPr>
         <p:spPr>
           <a:xfrm>
-            <a:off x="1408176" y="3685032"/>
-            <a:ext cx="6190488" cy="512064"/>
+            <a:off x="1408176" y="3749040"/>
+            <a:ext cx="6190488" cy="640080"/>
           </a:xfrm>
           <a:prstGeom prst="rect">
             <a:avLst/>
@@ -9635,8 +10478,14 @@
           <a:lstStyle/>
           <a:p>
             <a:pPr>
-              <a:spcAft>
-                <a:spcPts val="600"/>
+              <a:lnSpc>
+                <a:spcPct val="104000"/>
+              </a:lnSpc>
+              <a:spcBef>
+                <a:spcPts val="0"/>
+              </a:spcBef>
+              <a:spcAft>
+                <a:spcPts val="0"/>
               </a:spcAft>
               <a:defRPr sz="1300" b="0">
                 <a:solidFill>
@@ -9646,13 +10495,20 @@
               </a:defRPr>
             </a:pPr>
             <a:r>
+              <a:rPr lang="en-CA"/>
               <a:t>"Plan a reproducible baseline with a time-based split.</a:t>
             </a:r>
           </a:p>
           <a:p>
             <a:pPr>
-              <a:spcAft>
-                <a:spcPts val="600"/>
+              <a:lnSpc>
+                <a:spcPct val="104000"/>
+              </a:lnSpc>
+              <a:spcBef>
+                <a:spcPts val="0"/>
+              </a:spcBef>
+              <a:spcAft>
+                <a:spcPts val="0"/>
               </a:spcAft>
               <a:defRPr sz="1300" b="0">
                 <a:solidFill>
@@ -9662,13 +10518,20 @@
               </a:defRPr>
             </a:pPr>
             <a:r>
+              <a:rPr lang="en-CA"/>
               <a:t>Fit preprocessing on training data only.</a:t>
             </a:r>
           </a:p>
           <a:p>
             <a:pPr>
-              <a:spcAft>
-                <a:spcPts val="600"/>
+              <a:lnSpc>
+                <a:spcPct val="104000"/>
+              </a:lnSpc>
+              <a:spcBef>
+                <a:spcPts val="0"/>
+              </a:spcBef>
+              <a:spcAft>
+                <a:spcPts val="0"/>
               </a:spcAft>
               <a:defRPr sz="1300" b="0">
                 <a:solidFill>
@@ -9678,6 +10541,7 @@
               </a:defRPr>
             </a:pPr>
             <a:r>
+              <a:rPr lang="en-CA"/>
               <a:t>Define metrics and tests before coding."</a:t>
             </a:r>
           </a:p>
@@ -9691,8 +10555,8 @@
         </p:nvSpPr>
         <p:spPr>
           <a:xfrm>
-            <a:off x="548640" y="4379976"/>
-            <a:ext cx="7333488" cy="923544"/>
+            <a:off x="548640" y="4489704"/>
+            <a:ext cx="7333488" cy="1042415"/>
           </a:xfrm>
           <a:prstGeom prst="roundRect">
             <a:avLst>
@@ -9738,7 +10602,7 @@
         </p:nvSpPr>
         <p:spPr>
           <a:xfrm>
-            <a:off x="740664" y="4562856"/>
+            <a:off x="740664" y="4672584"/>
             <a:ext cx="484632" cy="484632"/>
           </a:xfrm>
           <a:prstGeom prst="roundRect">
@@ -9783,7 +10647,7 @@
         </p:nvSpPr>
         <p:spPr>
           <a:xfrm>
-            <a:off x="813816" y="4672584"/>
+            <a:off x="813816" y="4782312"/>
             <a:ext cx="365760" cy="219456"/>
           </a:xfrm>
           <a:prstGeom prst="rect">
@@ -9798,8 +10662,14 @@
           <a:lstStyle/>
           <a:p>
             <a:pPr>
-              <a:spcAft>
-                <a:spcPts val="600"/>
+              <a:lnSpc>
+                <a:spcPct val="104000"/>
+              </a:lnSpc>
+              <a:spcBef>
+                <a:spcPts val="0"/>
+              </a:spcBef>
+              <a:spcAft>
+                <a:spcPts val="0"/>
               </a:spcAft>
               <a:defRPr sz="1300" b="1">
                 <a:solidFill>
@@ -9809,6 +10679,7 @@
               </a:defRPr>
             </a:pPr>
             <a:r>
+              <a:rPr lang="en-CA"/>
               <a:t>03</a:t>
             </a:r>
           </a:p>
@@ -9822,7 +10693,7 @@
         </p:nvSpPr>
         <p:spPr>
           <a:xfrm>
-            <a:off x="1408176" y="4480560"/>
+            <a:off x="1408176" y="4590288"/>
             <a:ext cx="6126480" cy="256032"/>
           </a:xfrm>
           <a:prstGeom prst="rect">
@@ -9837,8 +10708,14 @@
           <a:lstStyle/>
           <a:p>
             <a:pPr>
-              <a:spcAft>
-                <a:spcPts val="600"/>
+              <a:lnSpc>
+                <a:spcPct val="104000"/>
+              </a:lnSpc>
+              <a:spcBef>
+                <a:spcPts val="0"/>
+              </a:spcBef>
+              <a:spcAft>
+                <a:spcPts val="0"/>
               </a:spcAft>
               <a:defRPr sz="1100" b="1">
                 <a:solidFill>
@@ -9848,6 +10725,7 @@
               </a:defRPr>
             </a:pPr>
             <a:r>
+              <a:rPr lang="en-CA"/>
               <a:t>IMPLEMENT / AGENT</a:t>
             </a:r>
           </a:p>
@@ -9861,8 +10739,8 @@
         </p:nvSpPr>
         <p:spPr>
           <a:xfrm>
-            <a:off x="1408176" y="4745736"/>
-            <a:ext cx="6190488" cy="512064"/>
+            <a:off x="1408176" y="4864608"/>
+            <a:ext cx="6190488" cy="640080"/>
           </a:xfrm>
           <a:prstGeom prst="rect">
             <a:avLst/>
@@ -9876,8 +10754,14 @@
           <a:lstStyle/>
           <a:p>
             <a:pPr>
-              <a:spcAft>
-                <a:spcPts val="600"/>
+              <a:lnSpc>
+                <a:spcPct val="104000"/>
+              </a:lnSpc>
+              <a:spcBef>
+                <a:spcPts val="0"/>
+              </a:spcBef>
+              <a:spcAft>
+                <a:spcPts val="0"/>
               </a:spcAft>
               <a:defRPr sz="1300" b="0">
                 <a:solidFill>
@@ -9887,13 +10771,20 @@
               </a:defRPr>
             </a:pPr>
             <a:r>
+              <a:rPr lang="en-CA"/>
               <a:t>"Implement the approved plan and run the tests.</a:t>
             </a:r>
           </a:p>
           <a:p>
             <a:pPr>
-              <a:spcAft>
-                <a:spcPts val="600"/>
+              <a:lnSpc>
+                <a:spcPct val="104000"/>
+              </a:lnSpc>
+              <a:spcBef>
+                <a:spcPts val="0"/>
+              </a:spcBef>
+              <a:spcAft>
+                <a:spcPts val="0"/>
               </a:spcAft>
               <a:defRPr sz="1300" b="0">
                 <a:solidFill>
@@ -9903,13 +10794,20 @@
               </a:defRPr>
             </a:pPr>
             <a:r>
+              <a:rPr lang="en-CA"/>
               <a:t>Report PR-AUC, calibration and subgroup results.</a:t>
             </a:r>
           </a:p>
           <a:p>
             <a:pPr>
-              <a:spcAft>
-                <a:spcPts val="600"/>
+              <a:lnSpc>
+                <a:spcPct val="104000"/>
+              </a:lnSpc>
+              <a:spcBef>
+                <a:spcPts val="0"/>
+              </a:spcBef>
+              <a:spcAft>
+                <a:spcPts val="0"/>
               </a:spcAft>
               <a:defRPr sz="1300" b="0">
                 <a:solidFill>
@@ -9919,6 +10817,7 @@
               </a:defRPr>
             </a:pPr>
             <a:r>
+              <a:rPr lang="en-CA"/>
               <a:t>Show the diff and any remaining limitations."</a:t>
             </a:r>
           </a:p>
@@ -9992,8 +10891,14 @@
           <a:lstStyle/>
           <a:p>
             <a:pPr>
-              <a:spcAft>
-                <a:spcPts val="600"/>
+              <a:lnSpc>
+                <a:spcPct val="104000"/>
+              </a:lnSpc>
+              <a:spcBef>
+                <a:spcPts val="0"/>
+              </a:spcBef>
+              <a:spcAft>
+                <a:spcPts val="0"/>
               </a:spcAft>
               <a:defRPr sz="1100" b="1">
                 <a:solidFill>
@@ -10003,6 +10908,7 @@
               </a:defRPr>
             </a:pPr>
             <a:r>
+              <a:rPr lang="en-CA"/>
               <a:t>DONE MEANS</a:t>
             </a:r>
           </a:p>
@@ -10017,7 +10923,7 @@
         <p:spPr>
           <a:xfrm>
             <a:off x="8412480" y="2999232"/>
-            <a:ext cx="2962656" cy="1975104"/>
+            <a:ext cx="3035808" cy="1975104"/>
           </a:xfrm>
           <a:prstGeom prst="rect">
             <a:avLst/>
@@ -10031,8 +10937,14 @@
           <a:lstStyle/>
           <a:p>
             <a:pPr>
-              <a:spcAft>
-                <a:spcPts val="600"/>
+              <a:lnSpc>
+                <a:spcPct val="104000"/>
+              </a:lnSpc>
+              <a:spcBef>
+                <a:spcPts val="0"/>
+              </a:spcBef>
+              <a:spcAft>
+                <a:spcPts val="0"/>
               </a:spcAft>
               <a:defRPr sz="1900" b="0">
                 <a:solidFill>
@@ -10042,13 +10954,20 @@
               </a:defRPr>
             </a:pPr>
             <a:r>
+              <a:rPr lang="en-CA"/>
               <a:t>A clean rerun works.</a:t>
             </a:r>
           </a:p>
           <a:p>
             <a:pPr>
-              <a:spcAft>
-                <a:spcPts val="600"/>
+              <a:lnSpc>
+                <a:spcPct val="104000"/>
+              </a:lnSpc>
+              <a:spcBef>
+                <a:spcPts val="0"/>
+              </a:spcBef>
+              <a:spcAft>
+                <a:spcPts val="0"/>
               </a:spcAft>
               <a:defRPr sz="1900" b="0">
                 <a:solidFill>
@@ -10058,13 +10977,20 @@
               </a:defRPr>
             </a:pPr>
             <a:r>
+              <a:rPr lang="en-CA"/>
               <a:t>Split and leakage tests pass.</a:t>
             </a:r>
           </a:p>
           <a:p>
             <a:pPr>
-              <a:spcAft>
-                <a:spcPts val="600"/>
+              <a:lnSpc>
+                <a:spcPct val="104000"/>
+              </a:lnSpc>
+              <a:spcBef>
+                <a:spcPts val="0"/>
+              </a:spcBef>
+              <a:spcAft>
+                <a:spcPts val="0"/>
               </a:spcAft>
               <a:defRPr sz="1900" b="0">
                 <a:solidFill>
@@ -10074,13 +11000,20 @@
               </a:defRPr>
             </a:pPr>
             <a:r>
+              <a:rPr lang="en-CA"/>
               <a:t>Metrics include limitations.</a:t>
             </a:r>
           </a:p>
           <a:p>
             <a:pPr>
-              <a:spcAft>
-                <a:spcPts val="600"/>
+              <a:lnSpc>
+                <a:spcPct val="104000"/>
+              </a:lnSpc>
+              <a:spcBef>
+                <a:spcPts val="0"/>
+              </a:spcBef>
+              <a:spcAft>
+                <a:spcPts val="0"/>
               </a:spcAft>
               <a:defRPr sz="1900" b="0">
                 <a:solidFill>
@@ -10090,6 +11023,7 @@
               </a:defRPr>
             </a:pPr>
             <a:r>
+              <a:rPr lang="en-CA"/>
               <a:t>A human reviews the result.</a:t>
             </a:r>
           </a:p>
@@ -10118,8 +11052,14 @@
           <a:lstStyle/>
           <a:p>
             <a:pPr>
-              <a:spcAft>
-                <a:spcPts val="600"/>
+              <a:lnSpc>
+                <a:spcPct val="104000"/>
+              </a:lnSpc>
+              <a:spcBef>
+                <a:spcPts val="0"/>
+              </a:spcBef>
+              <a:spcAft>
+                <a:spcPts val="0"/>
               </a:spcAft>
               <a:defRPr sz="1700" b="1">
                 <a:solidFill>
@@ -10129,6 +11069,7 @@
               </a:defRPr>
             </a:pPr>
             <a:r>
+              <a:rPr lang="en-CA"/>
               <a:t>Faster work. Same rigor.</a:t>
             </a:r>
           </a:p>
@@ -10202,8 +11143,14 @@
           <a:lstStyle/>
           <a:p>
             <a:pPr>
-              <a:spcAft>
-                <a:spcPts val="600"/>
+              <a:lnSpc>
+                <a:spcPct val="104000"/>
+              </a:lnSpc>
+              <a:spcBef>
+                <a:spcPts val="0"/>
+              </a:spcBef>
+              <a:spcAft>
+                <a:spcPts val="0"/>
               </a:spcAft>
               <a:defRPr sz="1300" b="1">
                 <a:solidFill>
@@ -10213,6 +11160,7 @@
               </a:defRPr>
             </a:pPr>
             <a:r>
+              <a:rPr lang="en-CA"/>
               <a:t>Banking guardrail: synthetic or approved de-identified data only; no client PII or secrets in prompts.</a:t>
             </a:r>
           </a:p>
